--- a/PRESENTATION.pptx
+++ b/PRESENTATION.pptx
@@ -3299,7 +3299,7 @@
         <p:spPr>
           <a:xfrm>
             <a:off x="822960" y="4114800"/>
-            <a:ext cx="10515600" cy="548640"/>
+            <a:ext cx="4083554" cy="400110"/>
           </a:xfrm>
           <a:prstGeom prst="rect">
             <a:avLst/>
@@ -3313,13 +3313,31 @@
           <a:lstStyle/>
           <a:p>
             <a:r>
-              <a:rPr sz="2000" b="1">
+              <a:rPr sz="2000" b="1" dirty="0">
                 <a:solidFill>
                   <a:srgbClr val="FFFFFF"/>
                 </a:solidFill>
                 <a:latin typeface="Calibri"/>
               </a:rPr>
-              <a:t>Lukas Bandalo  ·  Fabian Luttenberger</a:t>
+              <a:t>Lukas </a:t>
+            </a:r>
+            <a:r>
+              <a:rPr sz="2000" b="1" dirty="0" err="1">
+                <a:solidFill>
+                  <a:srgbClr val="FFFFFF"/>
+                </a:solidFill>
+                <a:latin typeface="Calibri"/>
+              </a:rPr>
+              <a:t>Bandalo</a:t>
+            </a:r>
+            <a:r>
+              <a:rPr sz="2000" b="1" dirty="0">
+                <a:solidFill>
+                  <a:srgbClr val="FFFFFF"/>
+                </a:solidFill>
+                <a:latin typeface="Calibri"/>
+              </a:rPr>
+              <a:t>    Fabian Luttenberger</a:t>
             </a:r>
           </a:p>
         </p:txBody>
@@ -3504,7 +3522,7 @@
         <p:spPr>
           <a:xfrm>
             <a:off x="640080" y="1828800"/>
-            <a:ext cx="5943600" cy="2328843"/>
+            <a:ext cx="5943600" cy="1523494"/>
           </a:xfrm>
           <a:prstGeom prst="rect">
             <a:avLst/>
@@ -3532,7 +3550,7 @@
                 </a:solidFill>
                 <a:latin typeface="Calibri"/>
               </a:rPr>
-              <a:t>auth-login: Spike, bis 50 VUs</a:t>
+              <a:t>auth-login (Fabian): Spike, bis 50 VUs</a:t>
             </a:r>
           </a:p>
           <a:p>
@@ -3621,7 +3639,7 @@
                 </a:solidFill>
                 <a:latin typeface="Calibri"/>
               </a:rPr>
-              <a:t>trips-read: Ramp, bis 20 VUs</a:t>
+              <a:t>trips-read (Lukas): Ramp, bis 20 VUs</a:t>
             </a:r>
           </a:p>
           <a:p>
@@ -3710,59 +3728,6 @@
                 <a:latin typeface="Calibri"/>
               </a:rPr>
               <a:t> Last</a:t>
-            </a:r>
-          </a:p>
-          <a:p>
-            <a:pPr>
-              <a:spcBef>
-                <a:spcPts val="600"/>
-              </a:spcBef>
-              <a:spcAft>
-                <a:spcPts val="800"/>
-              </a:spcAft>
-            </a:pPr>
-            <a:r>
-              <a:rPr sz="1700" b="1" dirty="0">
-                <a:solidFill>
-                  <a:srgbClr val="4F46E5"/>
-                </a:solidFill>
-                <a:latin typeface="Calibri"/>
-              </a:rPr>
-              <a:t>smoke</a:t>
-            </a:r>
-          </a:p>
-          <a:p>
-            <a:pPr>
-              <a:spcAft>
-                <a:spcPts val="800"/>
-              </a:spcAft>
-            </a:pPr>
-            <a:r>
-              <a:rPr sz="1700" b="0" dirty="0">
-                <a:solidFill>
-                  <a:srgbClr val="4B5563"/>
-                </a:solidFill>
-                <a:latin typeface="Calibri"/>
-              </a:rPr>
-              <a:t>▸  Baseline </a:t>
-            </a:r>
-            <a:r>
-              <a:rPr sz="1700" b="0" dirty="0" err="1">
-                <a:solidFill>
-                  <a:srgbClr val="4B5563"/>
-                </a:solidFill>
-                <a:latin typeface="Calibri"/>
-              </a:rPr>
-              <a:t>gegen</a:t>
-            </a:r>
-            <a:r>
-              <a:rPr sz="1700" b="0" dirty="0">
-                <a:solidFill>
-                  <a:srgbClr val="4B5563"/>
-                </a:solidFill>
-                <a:latin typeface="Calibri"/>
-              </a:rPr>
-              <a:t> /health</a:t>
             </a:r>
           </a:p>
         </p:txBody>
@@ -3848,29 +3813,14 @@
           <a:lstStyle/>
           <a:p>
             <a:r>
-              <a:rPr sz="1000" b="0" dirty="0">
+              <a:rPr lang="de-AT" sz="1000" b="0" dirty="0">
                 <a:solidFill>
                   <a:srgbClr val="6B7280"/>
                 </a:solidFill>
                 <a:latin typeface="Calibri"/>
               </a:rPr>
-              <a:t>TREK </a:t>
-            </a:r>
-            <a:r>
-              <a:rPr lang="de-AT" sz="1000" dirty="0">
-                <a:solidFill>
-                  <a:srgbClr val="6B7280"/>
-                </a:solidFill>
-                <a:latin typeface="Calibri"/>
-              </a:rPr>
-              <a:t>| WAT</a:t>
-            </a:r>
-            <a:endParaRPr sz="1000" b="0" dirty="0">
-              <a:solidFill>
-                <a:srgbClr val="6B7280"/>
-              </a:solidFill>
-              <a:latin typeface="Calibri"/>
-            </a:endParaRPr>
+              <a:t>TREK | WAT</a:t>
+            </a:r>
           </a:p>
         </p:txBody>
       </p:sp>
@@ -4151,7 +4101,7 @@
                 </a:solidFill>
                 <a:latin typeface="Calibri"/>
               </a:rPr>
-              <a:t>ca. </a:t>
+              <a:t>beinahe </a:t>
             </a:r>
             <a:r>
               <a:rPr sz="1500" b="0" dirty="0">
@@ -4160,7 +4110,7 @@
                 </a:solidFill>
                 <a:latin typeface="Calibri"/>
               </a:rPr>
-              <a:t>100 % HTTP 429, der Rate-Limiter </a:t>
+              <a:t>100% HTTP 429, der Rate-Limiter </a:t>
             </a:r>
             <a:r>
               <a:rPr sz="1500" b="0" dirty="0" err="1">
@@ -4232,7 +4182,7 @@
                 </a:solidFill>
                 <a:latin typeface="Calibri"/>
               </a:rPr>
-              <a:t>, 0 % 5xx.</a:t>
+              <a:t>, 0% 5xx.</a:t>
             </a:r>
           </a:p>
           <a:p>
@@ -4333,7 +4283,7 @@
                 </a:solidFill>
                 <a:latin typeface="Calibri"/>
               </a:rPr>
-              <a:t> pro Endpoint, 0 % Fehler.</a:t>
+              <a:t> pro Endpoint, 0% Fehler.</a:t>
             </a:r>
           </a:p>
           <a:p>
@@ -4344,7 +4294,7 @@
                 </a:solidFill>
                 <a:latin typeface="Calibri"/>
               </a:rPr>
-              <a:t>Fazit: </a:t>
+              <a:t>Fazit: Der </a:t>
             </a:r>
             <a:r>
               <a:rPr sz="1500" b="1" dirty="0" err="1">
@@ -4721,31 +4671,13 @@
           <a:p>
             <a:pPr algn="ctr"/>
             <a:r>
-              <a:rPr sz="1900" b="1" dirty="0">
+              <a:rPr sz="1900" b="1">
                 <a:solidFill>
                   <a:srgbClr val="FFFFFF"/>
                 </a:solidFill>
                 <a:latin typeface="Calibri"/>
               </a:rPr>
-              <a:t>Nicht </a:t>
-            </a:r>
-            <a:r>
-              <a:rPr sz="1900" b="1" dirty="0" err="1">
-                <a:solidFill>
-                  <a:srgbClr val="FFFFFF"/>
-                </a:solidFill>
-                <a:latin typeface="Calibri"/>
-              </a:rPr>
-              <a:t>nur</a:t>
-            </a:r>
-            <a:r>
-              <a:rPr sz="1900" b="1" dirty="0">
-                <a:solidFill>
-                  <a:srgbClr val="FFFFFF"/>
-                </a:solidFill>
-                <a:latin typeface="Calibri"/>
-              </a:rPr>
-              <a:t> Happy-Path</a:t>
+              <a:t>Nicht nur der Happy-Path</a:t>
             </a:r>
           </a:p>
           <a:p>
@@ -4755,247 +4687,13 @@
               </a:spcBef>
             </a:pPr>
             <a:r>
-              <a:rPr sz="1300" b="0" dirty="0">
+              <a:rPr sz="1300" b="0">
                 <a:solidFill>
                   <a:srgbClr val="FFFFFF"/>
                 </a:solidFill>
                 <a:latin typeface="Calibri"/>
               </a:rPr>
-              <a:t>Wir </a:t>
-            </a:r>
-            <a:r>
-              <a:rPr sz="1300" b="0" dirty="0" err="1">
-                <a:solidFill>
-                  <a:srgbClr val="FFFFFF"/>
-                </a:solidFill>
-                <a:latin typeface="Calibri"/>
-              </a:rPr>
-              <a:t>testen</a:t>
-            </a:r>
-            <a:r>
-              <a:rPr sz="1300" b="0" dirty="0">
-                <a:solidFill>
-                  <a:srgbClr val="FFFFFF"/>
-                </a:solidFill>
-                <a:latin typeface="Calibri"/>
-              </a:rPr>
-              <a:t> </a:t>
-            </a:r>
-            <a:r>
-              <a:rPr sz="1300" b="0" dirty="0" err="1">
-                <a:solidFill>
-                  <a:srgbClr val="FFFFFF"/>
-                </a:solidFill>
-                <a:latin typeface="Calibri"/>
-              </a:rPr>
-              <a:t>gezielt</a:t>
-            </a:r>
-            <a:r>
-              <a:rPr sz="1300" b="0" dirty="0">
-                <a:solidFill>
-                  <a:srgbClr val="FFFFFF"/>
-                </a:solidFill>
-                <a:latin typeface="Calibri"/>
-              </a:rPr>
-              <a:t> die </a:t>
-            </a:r>
-            <a:r>
-              <a:rPr sz="1300" b="0" dirty="0" err="1">
-                <a:solidFill>
-                  <a:srgbClr val="FFFFFF"/>
-                </a:solidFill>
-                <a:latin typeface="Calibri"/>
-              </a:rPr>
-              <a:t>riskanten</a:t>
-            </a:r>
-            <a:r>
-              <a:rPr sz="1300" b="0" dirty="0">
-                <a:solidFill>
-                  <a:srgbClr val="FFFFFF"/>
-                </a:solidFill>
-                <a:latin typeface="Calibri"/>
-              </a:rPr>
-              <a:t> </a:t>
-            </a:r>
-            <a:r>
-              <a:rPr sz="1300" b="0" dirty="0" err="1">
-                <a:solidFill>
-                  <a:srgbClr val="FFFFFF"/>
-                </a:solidFill>
-                <a:latin typeface="Calibri"/>
-              </a:rPr>
-              <a:t>Stellen</a:t>
-            </a:r>
-            <a:r>
-              <a:rPr sz="1300" b="0" dirty="0">
-                <a:solidFill>
-                  <a:srgbClr val="FFFFFF"/>
-                </a:solidFill>
-                <a:latin typeface="Calibri"/>
-              </a:rPr>
-              <a:t>: </a:t>
-            </a:r>
-            <a:r>
-              <a:rPr sz="1300" b="0" dirty="0" err="1">
-                <a:solidFill>
-                  <a:srgbClr val="FFFFFF"/>
-                </a:solidFill>
-                <a:latin typeface="Calibri"/>
-              </a:rPr>
-              <a:t>Berechtigungen</a:t>
-            </a:r>
-            <a:r>
-              <a:rPr sz="1300" b="0" dirty="0">
-                <a:solidFill>
-                  <a:srgbClr val="FFFFFF"/>
-                </a:solidFill>
-                <a:latin typeface="Calibri"/>
-              </a:rPr>
-              <a:t> (403/404), </a:t>
-            </a:r>
-            <a:r>
-              <a:rPr sz="1300" b="0" dirty="0" err="1">
-                <a:solidFill>
-                  <a:srgbClr val="FFFFFF"/>
-                </a:solidFill>
-                <a:latin typeface="Calibri"/>
-              </a:rPr>
-              <a:t>Falsch</a:t>
-            </a:r>
-            <a:r>
-              <a:rPr sz="1300" b="0" dirty="0">
-                <a:solidFill>
-                  <a:srgbClr val="FFFFFF"/>
-                </a:solidFill>
-                <a:latin typeface="Calibri"/>
-              </a:rPr>
-              <a:t>-Login (401) und </a:t>
-            </a:r>
-            <a:r>
-              <a:rPr sz="1300" b="0" dirty="0" err="1">
-                <a:solidFill>
-                  <a:srgbClr val="FFFFFF"/>
-                </a:solidFill>
-                <a:latin typeface="Calibri"/>
-              </a:rPr>
-              <a:t>Randfälle</a:t>
-            </a:r>
-            <a:r>
-              <a:rPr sz="1300" b="0" dirty="0">
-                <a:solidFill>
-                  <a:srgbClr val="FFFFFF"/>
-                </a:solidFill>
-                <a:latin typeface="Calibri"/>
-              </a:rPr>
-              <a:t> </a:t>
-            </a:r>
-            <a:r>
-              <a:rPr sz="1300" b="0" dirty="0" err="1">
-                <a:solidFill>
-                  <a:srgbClr val="FFFFFF"/>
-                </a:solidFill>
-                <a:latin typeface="Calibri"/>
-              </a:rPr>
-              <a:t>wie</a:t>
-            </a:r>
-            <a:r>
-              <a:rPr sz="1300" b="0" dirty="0">
-                <a:solidFill>
-                  <a:srgbClr val="FFFFFF"/>
-                </a:solidFill>
-                <a:latin typeface="Calibri"/>
-              </a:rPr>
-              <a:t> </a:t>
-            </a:r>
-            <a:r>
-              <a:rPr sz="1300" b="0" dirty="0" err="1">
-                <a:solidFill>
-                  <a:srgbClr val="FFFFFF"/>
-                </a:solidFill>
-                <a:latin typeface="Calibri"/>
-              </a:rPr>
-              <a:t>Rundung</a:t>
-            </a:r>
-            <a:r>
-              <a:rPr sz="1300" b="0" dirty="0">
-                <a:solidFill>
-                  <a:srgbClr val="FFFFFF"/>
-                </a:solidFill>
-                <a:latin typeface="Calibri"/>
-              </a:rPr>
-              <a:t>, </a:t>
-            </a:r>
-            <a:r>
-              <a:rPr sz="1300" b="0" dirty="0" err="1">
-                <a:solidFill>
-                  <a:srgbClr val="FFFFFF"/>
-                </a:solidFill>
-                <a:latin typeface="Calibri"/>
-              </a:rPr>
-              <a:t>Stornos</a:t>
-            </a:r>
-            <a:r>
-              <a:rPr sz="1300" b="0" dirty="0">
-                <a:solidFill>
-                  <a:srgbClr val="FFFFFF"/>
-                </a:solidFill>
-                <a:latin typeface="Calibri"/>
-              </a:rPr>
-              <a:t> </a:t>
-            </a:r>
-            <a:r>
-              <a:rPr sz="1300" b="0" dirty="0" err="1">
-                <a:solidFill>
-                  <a:srgbClr val="FFFFFF"/>
-                </a:solidFill>
-                <a:latin typeface="Calibri"/>
-              </a:rPr>
-              <a:t>oder</a:t>
-            </a:r>
-            <a:r>
-              <a:rPr sz="1300" b="0" dirty="0">
-                <a:solidFill>
-                  <a:srgbClr val="FFFFFF"/>
-                </a:solidFill>
-                <a:latin typeface="Calibri"/>
-              </a:rPr>
-              <a:t> </a:t>
-            </a:r>
-            <a:r>
-              <a:rPr sz="1300" b="0" dirty="0" err="1">
-                <a:solidFill>
-                  <a:srgbClr val="FFFFFF"/>
-                </a:solidFill>
-                <a:latin typeface="Calibri"/>
-              </a:rPr>
-              <a:t>Ausfall</a:t>
-            </a:r>
-            <a:r>
-              <a:rPr sz="1300" b="0" dirty="0">
-                <a:solidFill>
-                  <a:srgbClr val="FFFFFF"/>
-                </a:solidFill>
-                <a:latin typeface="Calibri"/>
-              </a:rPr>
-              <a:t> des Kurs-</a:t>
-            </a:r>
-            <a:r>
-              <a:rPr sz="1300" b="0" dirty="0" err="1">
-                <a:solidFill>
-                  <a:srgbClr val="FFFFFF"/>
-                </a:solidFill>
-                <a:latin typeface="Calibri"/>
-              </a:rPr>
-              <a:t>Dienstes</a:t>
-            </a:r>
-            <a:r>
-              <a:rPr sz="1300" b="0" dirty="0">
-                <a:solidFill>
-                  <a:srgbClr val="FFFFFF"/>
-                </a:solidFill>
-                <a:latin typeface="Calibri"/>
-              </a:rPr>
-              <a:t>.</a:t>
+              <a:t>Wir testen gezielt die riskanten Stellen: Berechtigungen (403/404), Falsch-Login (401) und Randfälle wie Rundung, Stornos oder Ausfall des Kurs-Dienstes.</a:t>
             </a:r>
           </a:p>
         </p:txBody>
@@ -5043,38 +4741,14 @@
           <a:p>
             <a:pPr algn="ctr"/>
             <a:r>
-              <a:rPr sz="1900" b="1" dirty="0" err="1">
+              <a:rPr sz="1900" b="1">
                 <a:solidFill>
                   <a:srgbClr val="FFFFFF"/>
                 </a:solidFill>
                 <a:latin typeface="Calibri"/>
               </a:rPr>
-              <a:t>Isoliert</a:t>
-            </a:r>
-            <a:r>
-              <a:rPr sz="1900" b="1" dirty="0">
-                <a:solidFill>
-                  <a:srgbClr val="FFFFFF"/>
-                </a:solidFill>
-                <a:latin typeface="Calibri"/>
-              </a:rPr>
-              <a:t> und </a:t>
-            </a:r>
-            <a:r>
-              <a:rPr sz="1900" b="1" dirty="0" err="1">
-                <a:solidFill>
-                  <a:srgbClr val="FFFFFF"/>
-                </a:solidFill>
-                <a:latin typeface="Calibri"/>
-              </a:rPr>
-              <a:t>automatisiert</a:t>
-            </a:r>
-            <a:endParaRPr sz="1900" b="1" dirty="0">
-              <a:solidFill>
-                <a:srgbClr val="FFFFFF"/>
-              </a:solidFill>
-              <a:latin typeface="Calibri"/>
-            </a:endParaRPr>
+              <a:t>Isoliert und automatisiert</a:t>
+            </a:r>
           </a:p>
           <a:p>
             <a:pPr>
@@ -5083,247 +4757,13 @@
               </a:spcBef>
             </a:pPr>
             <a:r>
-              <a:rPr sz="1300" b="0" dirty="0" err="1">
+              <a:rPr sz="1300" b="0">
                 <a:solidFill>
                   <a:srgbClr val="FFFFFF"/>
                 </a:solidFill>
                 <a:latin typeface="Calibri"/>
               </a:rPr>
-              <a:t>Eigener</a:t>
-            </a:r>
-            <a:r>
-              <a:rPr sz="1300" b="0" dirty="0">
-                <a:solidFill>
-                  <a:srgbClr val="FFFFFF"/>
-                </a:solidFill>
-                <a:latin typeface="Calibri"/>
-              </a:rPr>
-              <a:t> </a:t>
-            </a:r>
-            <a:r>
-              <a:rPr sz="1300" b="0" dirty="0" err="1">
-                <a:solidFill>
-                  <a:srgbClr val="FFFFFF"/>
-                </a:solidFill>
-                <a:latin typeface="Calibri"/>
-              </a:rPr>
-              <a:t>Teststack</a:t>
-            </a:r>
-            <a:r>
-              <a:rPr sz="1300" b="0" dirty="0">
-                <a:solidFill>
-                  <a:srgbClr val="FFFFFF"/>
-                </a:solidFill>
-                <a:latin typeface="Calibri"/>
-              </a:rPr>
-              <a:t> </a:t>
-            </a:r>
-            <a:r>
-              <a:rPr sz="1300" b="0" dirty="0" err="1">
-                <a:solidFill>
-                  <a:srgbClr val="FFFFFF"/>
-                </a:solidFill>
-                <a:latin typeface="Calibri"/>
-              </a:rPr>
-              <a:t>neben</a:t>
-            </a:r>
-            <a:r>
-              <a:rPr sz="1300" b="0" dirty="0">
-                <a:solidFill>
-                  <a:srgbClr val="FFFFFF"/>
-                </a:solidFill>
-                <a:latin typeface="Calibri"/>
-              </a:rPr>
-              <a:t> </a:t>
-            </a:r>
-            <a:r>
-              <a:rPr sz="1300" b="0" dirty="0" err="1">
-                <a:solidFill>
-                  <a:srgbClr val="FFFFFF"/>
-                </a:solidFill>
-                <a:latin typeface="Calibri"/>
-              </a:rPr>
-              <a:t>rund</a:t>
-            </a:r>
-            <a:r>
-              <a:rPr sz="1300" b="0" dirty="0">
-                <a:solidFill>
-                  <a:srgbClr val="FFFFFF"/>
-                </a:solidFill>
-                <a:latin typeface="Calibri"/>
-              </a:rPr>
-              <a:t> 390</a:t>
-            </a:r>
-            <a:r>
-              <a:rPr lang="de-AT" sz="1300" b="0" dirty="0">
-                <a:solidFill>
-                  <a:srgbClr val="FFFFFF"/>
-                </a:solidFill>
-                <a:latin typeface="Calibri"/>
-              </a:rPr>
-              <a:t> </a:t>
-            </a:r>
-            <a:r>
-              <a:rPr sz="1300" b="0" dirty="0" err="1">
-                <a:solidFill>
-                  <a:srgbClr val="FFFFFF"/>
-                </a:solidFill>
-                <a:latin typeface="Calibri"/>
-              </a:rPr>
-              <a:t>Bestandstests</a:t>
-            </a:r>
-            <a:r>
-              <a:rPr sz="1300" b="0" dirty="0">
-                <a:solidFill>
-                  <a:srgbClr val="FFFFFF"/>
-                </a:solidFill>
-                <a:latin typeface="Calibri"/>
-              </a:rPr>
-              <a:t>, </a:t>
-            </a:r>
-            <a:r>
-              <a:rPr sz="1300" b="0" dirty="0" err="1">
-                <a:solidFill>
-                  <a:srgbClr val="FFFFFF"/>
-                </a:solidFill>
-                <a:latin typeface="Calibri"/>
-              </a:rPr>
-              <a:t>ohne</a:t>
-            </a:r>
-            <a:r>
-              <a:rPr sz="1300" b="0" dirty="0">
-                <a:solidFill>
-                  <a:srgbClr val="FFFFFF"/>
-                </a:solidFill>
-                <a:latin typeface="Calibri"/>
-              </a:rPr>
-              <a:t> </a:t>
-            </a:r>
-            <a:r>
-              <a:rPr sz="1300" b="0" dirty="0" err="1">
-                <a:solidFill>
-                  <a:srgbClr val="FFFFFF"/>
-                </a:solidFill>
-                <a:latin typeface="Calibri"/>
-              </a:rPr>
-              <a:t>Kollision</a:t>
-            </a:r>
-            <a:r>
-              <a:rPr sz="1300" b="0" dirty="0">
-                <a:solidFill>
-                  <a:srgbClr val="FFFFFF"/>
-                </a:solidFill>
-                <a:latin typeface="Calibri"/>
-              </a:rPr>
-              <a:t>. </a:t>
-            </a:r>
-            <a:r>
-              <a:rPr sz="1300" b="0" dirty="0" err="1">
-                <a:solidFill>
-                  <a:srgbClr val="FFFFFF"/>
-                </a:solidFill>
-                <a:latin typeface="Calibri"/>
-              </a:rPr>
-              <a:t>Jeder</a:t>
-            </a:r>
-            <a:r>
-              <a:rPr sz="1300" b="0" dirty="0">
-                <a:solidFill>
-                  <a:srgbClr val="FFFFFF"/>
-                </a:solidFill>
-                <a:latin typeface="Calibri"/>
-              </a:rPr>
-              <a:t> Test </a:t>
-            </a:r>
-            <a:r>
-              <a:rPr sz="1300" b="0" dirty="0" err="1">
-                <a:solidFill>
-                  <a:srgbClr val="FFFFFF"/>
-                </a:solidFill>
-                <a:latin typeface="Calibri"/>
-              </a:rPr>
-              <a:t>mit</a:t>
-            </a:r>
-            <a:r>
-              <a:rPr sz="1300" b="0" dirty="0">
-                <a:solidFill>
-                  <a:srgbClr val="FFFFFF"/>
-                </a:solidFill>
-                <a:latin typeface="Calibri"/>
-              </a:rPr>
-              <a:t> </a:t>
-            </a:r>
-            <a:r>
-              <a:rPr sz="1300" b="0" dirty="0" err="1">
-                <a:solidFill>
-                  <a:srgbClr val="FFFFFF"/>
-                </a:solidFill>
-                <a:latin typeface="Calibri"/>
-              </a:rPr>
-              <a:t>eigener</a:t>
-            </a:r>
-            <a:r>
-              <a:rPr sz="1300" b="0" dirty="0">
-                <a:solidFill>
-                  <a:srgbClr val="FFFFFF"/>
-                </a:solidFill>
-                <a:latin typeface="Calibri"/>
-              </a:rPr>
-              <a:t> In-Memory-DB. Bei </a:t>
-            </a:r>
-            <a:r>
-              <a:rPr sz="1300" b="0" dirty="0" err="1">
-                <a:solidFill>
-                  <a:srgbClr val="FFFFFF"/>
-                </a:solidFill>
-                <a:latin typeface="Calibri"/>
-              </a:rPr>
-              <a:t>jedem</a:t>
-            </a:r>
-            <a:r>
-              <a:rPr sz="1300" b="0" dirty="0">
-                <a:solidFill>
-                  <a:srgbClr val="FFFFFF"/>
-                </a:solidFill>
-                <a:latin typeface="Calibri"/>
-              </a:rPr>
-              <a:t> PR </a:t>
-            </a:r>
-            <a:r>
-              <a:rPr sz="1300" b="0" dirty="0" err="1">
-                <a:solidFill>
-                  <a:srgbClr val="FFFFFF"/>
-                </a:solidFill>
-                <a:latin typeface="Calibri"/>
-              </a:rPr>
-              <a:t>grün</a:t>
-            </a:r>
-            <a:r>
-              <a:rPr sz="1300" b="0" dirty="0">
-                <a:solidFill>
-                  <a:srgbClr val="FFFFFF"/>
-                </a:solidFill>
-                <a:latin typeface="Calibri"/>
-              </a:rPr>
-              <a:t>, </a:t>
-            </a:r>
-            <a:r>
-              <a:rPr sz="1300" b="0" dirty="0" err="1">
-                <a:solidFill>
-                  <a:srgbClr val="FFFFFF"/>
-                </a:solidFill>
-                <a:latin typeface="Calibri"/>
-              </a:rPr>
-              <a:t>mit</a:t>
-            </a:r>
-            <a:r>
-              <a:rPr sz="1300" b="0" dirty="0">
-                <a:solidFill>
-                  <a:srgbClr val="FFFFFF"/>
-                </a:solidFill>
-                <a:latin typeface="Calibri"/>
-              </a:rPr>
-              <a:t> Report-, Coverage- und k6-Artefakten.</a:t>
+              <a:t>Eigener Teststack neben rund 390 Bestandstests, ohne Kollision. Jeder Test mit eigener In-Memory-DB. Bei jedem PR grün, mit Report-, Coverage- und k6-Artefakten.</a:t>
             </a:r>
           </a:p>
         </p:txBody>
@@ -5371,29 +4811,14 @@
           <a:p>
             <a:pPr algn="ctr"/>
             <a:r>
-              <a:rPr sz="1900" b="1" dirty="0">
+              <a:rPr sz="1900" b="1">
                 <a:solidFill>
                   <a:srgbClr val="FFFFFF"/>
                 </a:solidFill>
                 <a:latin typeface="Calibri"/>
               </a:rPr>
-              <a:t>Schutz </a:t>
-            </a:r>
-            <a:r>
-              <a:rPr sz="1900" b="1" dirty="0" err="1">
-                <a:solidFill>
-                  <a:srgbClr val="FFFFFF"/>
-                </a:solidFill>
-                <a:latin typeface="Calibri"/>
-              </a:rPr>
-              <a:t>nachgewiesen</a:t>
-            </a:r>
-            <a:endParaRPr sz="1900" b="1" dirty="0">
-              <a:solidFill>
-                <a:srgbClr val="FFFFFF"/>
-              </a:solidFill>
-              <a:latin typeface="Calibri"/>
-            </a:endParaRPr>
+              <a:t>Schutz nachgewiesen</a:t>
+            </a:r>
           </a:p>
           <a:p>
             <a:pPr>
@@ -5402,175 +4827,13 @@
               </a:spcBef>
             </a:pPr>
             <a:r>
-              <a:rPr sz="1300" b="0" dirty="0">
+              <a:rPr sz="1300" b="0">
                 <a:solidFill>
                   <a:srgbClr val="FFFFFF"/>
                 </a:solidFill>
                 <a:latin typeface="Calibri"/>
               </a:rPr>
-              <a:t>Login-Spike </a:t>
-            </a:r>
-            <a:r>
-              <a:rPr sz="1300" b="0" dirty="0" err="1">
-                <a:solidFill>
-                  <a:srgbClr val="FFFFFF"/>
-                </a:solidFill>
-                <a:latin typeface="Calibri"/>
-              </a:rPr>
-              <a:t>mit</a:t>
-            </a:r>
-            <a:r>
-              <a:rPr sz="1300" b="0" dirty="0">
-                <a:solidFill>
-                  <a:srgbClr val="FFFFFF"/>
-                </a:solidFill>
-                <a:latin typeface="Calibri"/>
-              </a:rPr>
-              <a:t> 50 VUs: </a:t>
-            </a:r>
-            <a:r>
-              <a:rPr sz="1300" b="0" dirty="0" err="1">
-                <a:solidFill>
-                  <a:srgbClr val="FFFFFF"/>
-                </a:solidFill>
-                <a:latin typeface="Calibri"/>
-              </a:rPr>
-              <a:t>nur</a:t>
-            </a:r>
-            <a:r>
-              <a:rPr sz="1300" b="0" dirty="0">
-                <a:solidFill>
-                  <a:srgbClr val="FFFFFF"/>
-                </a:solidFill>
-                <a:latin typeface="Calibri"/>
-              </a:rPr>
-              <a:t> 10 von 447.306 Logins </a:t>
-            </a:r>
-            <a:r>
-              <a:rPr sz="1300" b="0" dirty="0" err="1">
-                <a:solidFill>
-                  <a:srgbClr val="FFFFFF"/>
-                </a:solidFill>
-                <a:latin typeface="Calibri"/>
-              </a:rPr>
-              <a:t>kamen</a:t>
-            </a:r>
-            <a:r>
-              <a:rPr sz="1300" b="0" dirty="0">
-                <a:solidFill>
-                  <a:srgbClr val="FFFFFF"/>
-                </a:solidFill>
-                <a:latin typeface="Calibri"/>
-              </a:rPr>
-              <a:t> </a:t>
-            </a:r>
-            <a:r>
-              <a:rPr sz="1300" b="0" dirty="0" err="1">
-                <a:solidFill>
-                  <a:srgbClr val="FFFFFF"/>
-                </a:solidFill>
-                <a:latin typeface="Calibri"/>
-              </a:rPr>
-              <a:t>durch</a:t>
-            </a:r>
-            <a:r>
-              <a:rPr sz="1300" b="0" dirty="0">
-                <a:solidFill>
-                  <a:srgbClr val="FFFFFF"/>
-                </a:solidFill>
-                <a:latin typeface="Calibri"/>
-              </a:rPr>
-              <a:t>. Der Rate-Limiter </a:t>
-            </a:r>
-            <a:r>
-              <a:rPr sz="1300" b="0" dirty="0" err="1">
-                <a:solidFill>
-                  <a:srgbClr val="FFFFFF"/>
-                </a:solidFill>
-                <a:latin typeface="Calibri"/>
-              </a:rPr>
-              <a:t>fängt</a:t>
-            </a:r>
-            <a:r>
-              <a:rPr sz="1300" b="0" dirty="0">
-                <a:solidFill>
-                  <a:srgbClr val="FFFFFF"/>
-                </a:solidFill>
-                <a:latin typeface="Calibri"/>
-              </a:rPr>
-              <a:t> den </a:t>
-            </a:r>
-            <a:r>
-              <a:rPr sz="1300" b="0" dirty="0" err="1">
-                <a:solidFill>
-                  <a:srgbClr val="FFFFFF"/>
-                </a:solidFill>
-                <a:latin typeface="Calibri"/>
-              </a:rPr>
-              <a:t>Ansturm</a:t>
-            </a:r>
-            <a:r>
-              <a:rPr sz="1300" b="0" dirty="0">
-                <a:solidFill>
-                  <a:srgbClr val="FFFFFF"/>
-                </a:solidFill>
-                <a:latin typeface="Calibri"/>
-              </a:rPr>
-              <a:t> ab, bevor </a:t>
-            </a:r>
-            <a:r>
-              <a:rPr sz="1300" b="0" dirty="0" err="1">
-                <a:solidFill>
-                  <a:srgbClr val="FFFFFF"/>
-                </a:solidFill>
-                <a:latin typeface="Calibri"/>
-              </a:rPr>
-              <a:t>bcrypt</a:t>
-            </a:r>
-            <a:r>
-              <a:rPr sz="1300" b="0" dirty="0">
-                <a:solidFill>
-                  <a:srgbClr val="FFFFFF"/>
-                </a:solidFill>
-                <a:latin typeface="Calibri"/>
-              </a:rPr>
-              <a:t> </a:t>
-            </a:r>
-            <a:r>
-              <a:rPr sz="1300" b="0" dirty="0" err="1">
-                <a:solidFill>
-                  <a:srgbClr val="FFFFFF"/>
-                </a:solidFill>
-                <a:latin typeface="Calibri"/>
-              </a:rPr>
-              <a:t>läuft</a:t>
-            </a:r>
-            <a:r>
-              <a:rPr sz="1300" b="0" dirty="0">
-                <a:solidFill>
-                  <a:srgbClr val="FFFFFF"/>
-                </a:solidFill>
-                <a:latin typeface="Calibri"/>
-              </a:rPr>
-              <a:t>. p95 6 </a:t>
-            </a:r>
-            <a:r>
-              <a:rPr sz="1300" b="0" dirty="0" err="1">
-                <a:solidFill>
-                  <a:srgbClr val="FFFFFF"/>
-                </a:solidFill>
-                <a:latin typeface="Calibri"/>
-              </a:rPr>
-              <a:t>ms</a:t>
-            </a:r>
-            <a:r>
-              <a:rPr sz="1300" b="0" dirty="0">
-                <a:solidFill>
-                  <a:srgbClr val="FFFFFF"/>
-                </a:solidFill>
-                <a:latin typeface="Calibri"/>
-              </a:rPr>
-              <a:t>, 0 Fehler.</a:t>
+              <a:t>Login-Spike mit 50 VUs: nur 10 von 447.306 Logins kamen durch. Der Rate-Limiter fängt den Ansturm ab, bevor bcrypt läuft. p95 6 ms, 0 Fehler.</a:t>
             </a:r>
           </a:p>
         </p:txBody>
@@ -5607,7 +4870,7 @@
               <a:t>TREK </a:t>
             </a:r>
             <a:r>
-              <a:rPr lang="de-AT" sz="1000">
+              <a:rPr lang="de-AT" sz="1000" dirty="0">
                 <a:solidFill>
                   <a:srgbClr val="6B7280"/>
                 </a:solidFill>
@@ -5805,7 +5068,7 @@
         <p:spPr>
           <a:xfrm>
             <a:off x="640080" y="1828800"/>
-            <a:ext cx="5943600" cy="2944396"/>
+            <a:ext cx="5943600" cy="4297680"/>
           </a:xfrm>
           <a:prstGeom prst="rect">
             <a:avLst/>
@@ -5824,47 +5087,14 @@
               </a:spcAft>
             </a:pPr>
             <a:r>
-              <a:rPr sz="1800" b="0" dirty="0">
+              <a:rPr sz="1800" b="0">
                 <a:solidFill>
                   <a:srgbClr val="4B5563"/>
                 </a:solidFill>
                 <a:latin typeface="Calibri"/>
               </a:rPr>
-              <a:t>▸  Self-hosted, </a:t>
-            </a:r>
-            <a:r>
-              <a:rPr sz="1800" b="0" dirty="0" err="1">
-                <a:solidFill>
-                  <a:srgbClr val="4B5563"/>
-                </a:solidFill>
-                <a:latin typeface="Calibri"/>
-              </a:rPr>
-              <a:t>kollaborativer</a:t>
-            </a:r>
-            <a:r>
-              <a:rPr sz="1800" b="0" dirty="0">
-                <a:solidFill>
-                  <a:srgbClr val="4B5563"/>
-                </a:solidFill>
-                <a:latin typeface="Calibri"/>
-              </a:rPr>
-              <a:t> </a:t>
-            </a:r>
-            <a:r>
-              <a:rPr sz="1800" b="0" dirty="0" err="1">
-                <a:solidFill>
-                  <a:srgbClr val="4B5563"/>
-                </a:solidFill>
-                <a:latin typeface="Calibri"/>
-              </a:rPr>
-              <a:t>Reiseplaner</a:t>
-            </a:r>
-            <a:endParaRPr sz="1800" b="0" dirty="0">
-              <a:solidFill>
-                <a:srgbClr val="4B5563"/>
-              </a:solidFill>
-              <a:latin typeface="Calibri"/>
-            </a:endParaRPr>
+              <a:t>▸  Self-hosted, kollaborativer Reiseplaner</a:t>
+            </a:r>
           </a:p>
           <a:p>
             <a:pPr>
@@ -5873,67 +5103,13 @@
               </a:spcAft>
             </a:pPr>
             <a:r>
-              <a:rPr sz="1800" b="0" dirty="0">
+              <a:rPr sz="1800" b="0">
                 <a:solidFill>
                   <a:srgbClr val="4B5563"/>
                 </a:solidFill>
                 <a:latin typeface="Calibri"/>
               </a:rPr>
-              <a:t>▸  Karten und </a:t>
-            </a:r>
-            <a:r>
-              <a:rPr sz="1800" b="0" dirty="0" err="1">
-                <a:solidFill>
-                  <a:srgbClr val="4B5563"/>
-                </a:solidFill>
-                <a:latin typeface="Calibri"/>
-              </a:rPr>
-              <a:t>Tagesplan</a:t>
-            </a:r>
-            <a:r>
-              <a:rPr sz="1800" b="0" dirty="0">
-                <a:solidFill>
-                  <a:srgbClr val="4B5563"/>
-                </a:solidFill>
-                <a:latin typeface="Calibri"/>
-              </a:rPr>
-              <a:t>, Budget </a:t>
-            </a:r>
-            <a:r>
-              <a:rPr sz="1800" b="0" dirty="0" err="1">
-                <a:solidFill>
-                  <a:srgbClr val="4B5563"/>
-                </a:solidFill>
-                <a:latin typeface="Calibri"/>
-              </a:rPr>
-              <a:t>mit</a:t>
-            </a:r>
-            <a:r>
-              <a:rPr sz="1800" b="0" dirty="0">
-                <a:solidFill>
-                  <a:srgbClr val="4B5563"/>
-                </a:solidFill>
-                <a:latin typeface="Calibri"/>
-              </a:rPr>
-              <a:t> Kostenteilung, Vacay,</a:t>
-            </a:r>
-            <a:r>
-              <a:rPr lang="de-AT" dirty="0">
-                <a:solidFill>
-                  <a:srgbClr val="4B5563"/>
-                </a:solidFill>
-                <a:latin typeface="Calibri"/>
-              </a:rPr>
-              <a:t> </a:t>
-            </a:r>
-            <a:r>
-              <a:rPr sz="1800" b="0" dirty="0">
-                <a:solidFill>
-                  <a:srgbClr val="4B5563"/>
-                </a:solidFill>
-                <a:latin typeface="Calibri"/>
-              </a:rPr>
-              <a:t>Journal</a:t>
+              <a:t>▸  Karten und Tagesplan, Budget mit Kostenteilung, Vacay, Journal</a:t>
             </a:r>
           </a:p>
           <a:p>
@@ -5946,7 +5122,7 @@
               </a:spcAft>
             </a:pPr>
             <a:r>
-              <a:rPr sz="1700" b="1" dirty="0">
+              <a:rPr sz="1700" b="1">
                 <a:solidFill>
                   <a:srgbClr val="4F46E5"/>
                 </a:solidFill>
@@ -5962,47 +5138,14 @@
               </a:spcAft>
             </a:pPr>
             <a:r>
-              <a:rPr sz="1800" b="0" dirty="0">
+              <a:rPr sz="1800" b="0">
                 <a:solidFill>
                   <a:srgbClr val="4B5563"/>
                 </a:solidFill>
                 <a:latin typeface="Calibri"/>
               </a:rPr>
-              <a:t>▸  </a:t>
-            </a:r>
-            <a:r>
-              <a:rPr sz="1800" b="0" dirty="0" err="1">
-                <a:solidFill>
-                  <a:srgbClr val="4B5563"/>
-                </a:solidFill>
-                <a:latin typeface="Calibri"/>
-              </a:rPr>
-              <a:t>NestJS</a:t>
-            </a:r>
-            <a:r>
-              <a:rPr sz="1800" b="0" dirty="0">
-                <a:solidFill>
-                  <a:srgbClr val="4B5563"/>
-                </a:solidFill>
-                <a:latin typeface="Calibri"/>
-              </a:rPr>
-              <a:t> 11 + SQLite, React 19 + Vite, </a:t>
-            </a:r>
-            <a:r>
-              <a:rPr sz="1800" b="0" dirty="0" err="1">
-                <a:solidFill>
-                  <a:srgbClr val="4B5563"/>
-                </a:solidFill>
-                <a:latin typeface="Calibri"/>
-              </a:rPr>
-              <a:t>npm-Monorepo</a:t>
-            </a:r>
-            <a:endParaRPr sz="1800" b="0" dirty="0">
-              <a:solidFill>
-                <a:srgbClr val="4B5563"/>
-              </a:solidFill>
-              <a:latin typeface="Calibri"/>
-            </a:endParaRPr>
+              <a:t>▸  NestJS 11 + SQLite, React 19 + Vite, npm-Monorepo</a:t>
+            </a:r>
           </a:p>
           <a:p>
             <a:pPr>
@@ -6014,22 +5157,13 @@
               </a:spcAft>
             </a:pPr>
             <a:r>
-              <a:rPr sz="1700" b="1" dirty="0" err="1">
+              <a:rPr sz="1700" b="1">
                 <a:solidFill>
                   <a:srgbClr val="4F46E5"/>
                 </a:solidFill>
                 <a:latin typeface="Calibri"/>
               </a:rPr>
-              <a:t>Warum</a:t>
-            </a:r>
-            <a:r>
-              <a:rPr sz="1700" b="1" dirty="0">
-                <a:solidFill>
-                  <a:srgbClr val="4F46E5"/>
-                </a:solidFill>
-                <a:latin typeface="Calibri"/>
-              </a:rPr>
-              <a:t> TREK</a:t>
+              <a:t>Warum TREK</a:t>
             </a:r>
           </a:p>
           <a:p>
@@ -6039,65 +5173,14 @@
               </a:spcAft>
             </a:pPr>
             <a:r>
-              <a:rPr sz="1800" b="0" dirty="0">
+              <a:rPr sz="1800" b="0">
                 <a:solidFill>
                   <a:srgbClr val="4B5563"/>
                 </a:solidFill>
                 <a:latin typeface="Calibri"/>
               </a:rPr>
-              <a:t>▸  Echte </a:t>
-            </a:r>
-            <a:r>
-              <a:rPr sz="1800" b="0" dirty="0" err="1">
-                <a:solidFill>
-                  <a:srgbClr val="4B5563"/>
-                </a:solidFill>
-                <a:latin typeface="Calibri"/>
-              </a:rPr>
-              <a:t>Geschäftslogik</a:t>
-            </a:r>
-            <a:r>
-              <a:rPr sz="1800" b="0" dirty="0">
-                <a:solidFill>
-                  <a:srgbClr val="4B5563"/>
-                </a:solidFill>
-                <a:latin typeface="Calibri"/>
-              </a:rPr>
-              <a:t>: Settlement, </a:t>
-            </a:r>
-            <a:r>
-              <a:rPr sz="1800" b="0" dirty="0" err="1">
-                <a:solidFill>
-                  <a:srgbClr val="4B5563"/>
-                </a:solidFill>
-                <a:latin typeface="Calibri"/>
-              </a:rPr>
-              <a:t>Tagesgenerierung</a:t>
-            </a:r>
-            <a:r>
-              <a:rPr sz="1800" b="0" dirty="0">
-                <a:solidFill>
-                  <a:srgbClr val="4B5563"/>
-                </a:solidFill>
-                <a:latin typeface="Calibri"/>
-              </a:rPr>
-              <a:t>, Auth, </a:t>
-            </a:r>
-            <a:r>
-              <a:rPr sz="1800" b="0" dirty="0" err="1">
-                <a:solidFill>
-                  <a:srgbClr val="4B5563"/>
-                </a:solidFill>
-                <a:latin typeface="Calibri"/>
-              </a:rPr>
-              <a:t>Mehrwährung</a:t>
-            </a:r>
-            <a:endParaRPr sz="1800" b="0" dirty="0">
-              <a:solidFill>
-                <a:srgbClr val="4B5563"/>
-              </a:solidFill>
-              <a:latin typeface="Calibri"/>
-            </a:endParaRPr>
+              <a:t>▸  Echte Geschäftslogik: Settlement, Tagesgenerierung, Auth, Mehrwährung</a:t>
+            </a:r>
           </a:p>
         </p:txBody>
       </p:sp>
@@ -6162,13 +5245,13 @@
               <a:t>TREK </a:t>
             </a:r>
             <a:r>
-              <a:rPr lang="de-AT" sz="1000" b="0" dirty="0">
+              <a:rPr lang="de-AT" sz="1000" dirty="0">
                 <a:solidFill>
                   <a:srgbClr val="6B7280"/>
                 </a:solidFill>
                 <a:latin typeface="Calibri"/>
               </a:rPr>
-              <a:t>| WAT</a:t>
+              <a:t>| WAT</a:t>
             </a:r>
             <a:endParaRPr sz="1000" b="0" dirty="0">
               <a:solidFill>
@@ -6360,7 +5443,7 @@
         <p:spPr>
           <a:xfrm>
             <a:off x="640080" y="1874519"/>
-            <a:ext cx="10972800" cy="4297680"/>
+            <a:ext cx="10972800" cy="1677382"/>
           </a:xfrm>
           <a:prstGeom prst="rect">
             <a:avLst/>
@@ -6379,13 +5462,67 @@
               </a:spcAft>
             </a:pPr>
             <a:r>
-              <a:rPr sz="2000" b="0">
+              <a:rPr sz="2000" b="0" dirty="0">
                 <a:solidFill>
                   <a:srgbClr val="4B5563"/>
                 </a:solidFill>
                 <a:latin typeface="Calibri"/>
               </a:rPr>
-              <a:t>▸  Upstream hat schon ~390 Tests (Vitest + Playwright), 80% Coverage-Gate</a:t>
+              <a:t>▸  Upstream hat </a:t>
+            </a:r>
+            <a:r>
+              <a:rPr sz="2000" b="0" dirty="0" err="1">
+                <a:solidFill>
+                  <a:srgbClr val="4B5563"/>
+                </a:solidFill>
+                <a:latin typeface="Calibri"/>
+              </a:rPr>
+              <a:t>schon</a:t>
+            </a:r>
+            <a:r>
+              <a:rPr sz="2000" b="0" dirty="0">
+                <a:solidFill>
+                  <a:srgbClr val="4B5563"/>
+                </a:solidFill>
+                <a:latin typeface="Calibri"/>
+              </a:rPr>
+              <a:t> </a:t>
+            </a:r>
+            <a:r>
+              <a:rPr lang="de-AT" sz="2000" b="0" dirty="0">
+                <a:solidFill>
+                  <a:srgbClr val="4B5563"/>
+                </a:solidFill>
+                <a:latin typeface="Calibri"/>
+              </a:rPr>
+              <a:t>ca. </a:t>
+            </a:r>
+            <a:r>
+              <a:rPr sz="2000" b="0" dirty="0">
+                <a:solidFill>
+                  <a:srgbClr val="4B5563"/>
+                </a:solidFill>
+                <a:latin typeface="Calibri"/>
+              </a:rPr>
+              <a:t>390 Tests (</a:t>
+            </a:r>
+            <a:r>
+              <a:rPr sz="2000" b="0" dirty="0" err="1">
+                <a:solidFill>
+                  <a:srgbClr val="4B5563"/>
+                </a:solidFill>
+                <a:latin typeface="Calibri"/>
+              </a:rPr>
+              <a:t>Vitest</a:t>
+            </a:r>
+            <a:r>
+              <a:rPr sz="2000" b="0" dirty="0">
+                <a:solidFill>
+                  <a:srgbClr val="4B5563"/>
+                </a:solidFill>
+                <a:latin typeface="Calibri"/>
+              </a:rPr>
+              <a:t> + Playwright), 80% Coverage-Gate</a:t>
             </a:r>
           </a:p>
           <a:p>
@@ -6398,14 +5535,29 @@
               </a:spcAft>
             </a:pPr>
             <a:r>
+              <a:rPr sz="1800" b="1" dirty="0">
+                <a:solidFill>
+                  <a:srgbClr val="4F46E5"/>
+                </a:solidFill>
+                <a:latin typeface="Calibri"/>
+              </a:rPr>
+              <a:t>Unsere </a:t>
+            </a:r>
+            <a:r>
               <a:rPr sz="1800" b="1">
                 <a:solidFill>
                   <a:srgbClr val="4F46E5"/>
                 </a:solidFill>
                 <a:latin typeface="Calibri"/>
               </a:rPr>
-              <a:t>Angabe erlaubt zwei Wege</a:t>
-            </a:r>
+              <a:t>Wahl:</a:t>
+            </a:r>
+            <a:endParaRPr lang="de-AT" sz="1800" b="1" dirty="0">
+              <a:solidFill>
+                <a:srgbClr val="4F46E5"/>
+              </a:solidFill>
+              <a:latin typeface="Calibri"/>
+            </a:endParaRPr>
           </a:p>
           <a:p>
             <a:pPr>
@@ -6414,13 +5566,49 @@
               </a:spcAft>
             </a:pPr>
             <a:r>
-              <a:rPr sz="2000" b="0">
+              <a:rPr lang="de-AT" sz="2000" b="0" dirty="0">
                 <a:solidFill>
                   <a:srgbClr val="4B5563"/>
                 </a:solidFill>
                 <a:latin typeface="Calibri"/>
               </a:rPr>
-              <a:t>▸  1) Coverage messen und ungetesteten Code ergänzen</a:t>
+              <a:t>▸  Jest statt </a:t>
+            </a:r>
+            <a:r>
+              <a:rPr lang="de-AT" sz="2000" b="0" dirty="0" err="1">
+                <a:solidFill>
+                  <a:srgbClr val="4B5563"/>
+                </a:solidFill>
+                <a:latin typeface="Calibri"/>
+              </a:rPr>
+              <a:t>Vitest</a:t>
+            </a:r>
+            <a:r>
+              <a:rPr lang="de-AT" sz="2000" b="0" dirty="0">
+                <a:solidFill>
+                  <a:srgbClr val="4B5563"/>
+                </a:solidFill>
+                <a:latin typeface="Calibri"/>
+              </a:rPr>
+              <a:t>, Cypress statt </a:t>
+            </a:r>
+            <a:r>
+              <a:rPr lang="de-AT" sz="2000" b="0" dirty="0" err="1">
+                <a:solidFill>
+                  <a:srgbClr val="4B5563"/>
+                </a:solidFill>
+                <a:latin typeface="Calibri"/>
+              </a:rPr>
+              <a:t>Playwright</a:t>
+            </a:r>
+            <a:r>
+              <a:rPr lang="de-AT" sz="2000" b="0" dirty="0">
+                <a:solidFill>
+                  <a:srgbClr val="4B5563"/>
+                </a:solidFill>
+                <a:latin typeface="Calibri"/>
+              </a:rPr>
+              <a:t>, k6 (zuvor kein Last-Tool)</a:t>
             </a:r>
           </a:p>
           <a:p>
@@ -6430,64 +5618,85 @@
               </a:spcAft>
             </a:pPr>
             <a:r>
-              <a:rPr sz="2000" b="0">
+              <a:rPr sz="2000" b="0" dirty="0">
                 <a:solidFill>
                   <a:srgbClr val="4B5563"/>
                 </a:solidFill>
                 <a:latin typeface="Calibri"/>
               </a:rPr>
-              <a:t>▸  2) eigene Tests mit einem anderen Framework</a:t>
-            </a:r>
-          </a:p>
-          <a:p>
-            <a:pPr>
-              <a:spcBef>
-                <a:spcPts val="600"/>
-              </a:spcBef>
-              <a:spcAft>
-                <a:spcPts val="800"/>
-              </a:spcAft>
-            </a:pPr>
-            <a:r>
-              <a:rPr sz="1800" b="1">
-                <a:solidFill>
-                  <a:srgbClr val="4F46E5"/>
-                </a:solidFill>
-                <a:latin typeface="Calibri"/>
-              </a:rPr>
-              <a:t>Unsere Wahl: Weg 2 plus Kernfunktionen</a:t>
-            </a:r>
-          </a:p>
-          <a:p>
-            <a:pPr>
-              <a:spcAft>
-                <a:spcPts val="800"/>
-              </a:spcAft>
-            </a:pPr>
-            <a:r>
-              <a:rPr sz="2000" b="0">
+              <a:t>▸  </a:t>
+            </a:r>
+            <a:r>
+              <a:rPr sz="2000" b="0" dirty="0" err="1">
                 <a:solidFill>
                   <a:srgbClr val="4B5563"/>
                 </a:solidFill>
                 <a:latin typeface="Calibri"/>
               </a:rPr>
-              <a:t>▸  Jest statt Vitest, Cypress statt Playwright, k6 (zuvor kein Last-Tool)</a:t>
-            </a:r>
-          </a:p>
-          <a:p>
-            <a:pPr>
-              <a:spcAft>
-                <a:spcPts val="800"/>
-              </a:spcAft>
-            </a:pPr>
-            <a:r>
-              <a:rPr sz="2000" b="0">
+              <a:t>Eigene</a:t>
+            </a:r>
+            <a:r>
+              <a:rPr sz="2000" b="0" dirty="0">
                 <a:solidFill>
                   <a:srgbClr val="4B5563"/>
                 </a:solidFill>
                 <a:latin typeface="Calibri"/>
               </a:rPr>
-              <a:t>▸  Eigene Ordner, keine Kollision mit dem Upstream</a:t>
+              <a:t> Ordner, </a:t>
+            </a:r>
+            <a:r>
+              <a:rPr sz="2000" b="0" dirty="0" err="1">
+                <a:solidFill>
+                  <a:srgbClr val="4B5563"/>
+                </a:solidFill>
+                <a:latin typeface="Calibri"/>
+              </a:rPr>
+              <a:t>keine</a:t>
+            </a:r>
+            <a:r>
+              <a:rPr sz="2000" b="0" dirty="0">
+                <a:solidFill>
+                  <a:srgbClr val="4B5563"/>
+                </a:solidFill>
+                <a:latin typeface="Calibri"/>
+              </a:rPr>
+              <a:t> </a:t>
+            </a:r>
+            <a:r>
+              <a:rPr sz="2000" b="0" dirty="0" err="1">
+                <a:solidFill>
+                  <a:srgbClr val="4B5563"/>
+                </a:solidFill>
+                <a:latin typeface="Calibri"/>
+              </a:rPr>
+              <a:t>Kollision</a:t>
+            </a:r>
+            <a:r>
+              <a:rPr sz="2000" b="0" dirty="0">
+                <a:solidFill>
+                  <a:srgbClr val="4B5563"/>
+                </a:solidFill>
+                <a:latin typeface="Calibri"/>
+              </a:rPr>
+              <a:t> </a:t>
+            </a:r>
+            <a:r>
+              <a:rPr sz="2000" b="0" dirty="0" err="1">
+                <a:solidFill>
+                  <a:srgbClr val="4B5563"/>
+                </a:solidFill>
+                <a:latin typeface="Calibri"/>
+              </a:rPr>
+              <a:t>mit</a:t>
+            </a:r>
+            <a:r>
+              <a:rPr sz="2000" b="0" dirty="0">
+                <a:solidFill>
+                  <a:srgbClr val="4B5563"/>
+                </a:solidFill>
+                <a:latin typeface="Calibri"/>
+              </a:rPr>
+              <a:t> dem Upstream</a:t>
             </a:r>
           </a:p>
         </p:txBody>
@@ -7063,7 +6272,7 @@
         <p:spPr>
           <a:xfrm>
             <a:off x="640080" y="841248"/>
-            <a:ext cx="11155680" cy="914400"/>
+            <a:ext cx="3139577" cy="569387"/>
           </a:xfrm>
           <a:prstGeom prst="rect">
             <a:avLst/>
@@ -7077,27 +6286,967 @@
           <a:lstStyle/>
           <a:p>
             <a:r>
-              <a:rPr sz="3100" b="1">
+              <a:rPr sz="3100" b="1" dirty="0">
                 <a:solidFill>
                   <a:srgbClr val="1F2937"/>
                 </a:solidFill>
                 <a:latin typeface="Calibri"/>
               </a:rPr>
-              <a:t>Was und warum: Lukas</a:t>
-            </a:r>
-          </a:p>
-        </p:txBody>
-      </p:sp>
-      <p:sp>
-        <p:nvSpPr>
-          <p:cNvPr id="5" name="TextBox 4"/>
+              <a:t>Was, </a:t>
+            </a:r>
+            <a:r>
+              <a:rPr sz="3100" b="1" dirty="0" err="1">
+                <a:solidFill>
+                  <a:srgbClr val="1F2937"/>
+                </a:solidFill>
+                <a:latin typeface="Calibri"/>
+              </a:rPr>
+              <a:t>warum</a:t>
+            </a:r>
+            <a:r>
+              <a:rPr sz="3100" b="1" dirty="0">
+                <a:solidFill>
+                  <a:srgbClr val="1F2937"/>
+                </a:solidFill>
+                <a:latin typeface="Calibri"/>
+              </a:rPr>
+              <a:t>, </a:t>
+            </a:r>
+            <a:r>
+              <a:rPr sz="3100" b="1" dirty="0" err="1">
+                <a:solidFill>
+                  <a:srgbClr val="1F2937"/>
+                </a:solidFill>
+                <a:latin typeface="Calibri"/>
+              </a:rPr>
+              <a:t>wie</a:t>
+            </a:r>
+            <a:endParaRPr sz="3100" b="1" dirty="0">
+              <a:solidFill>
+                <a:srgbClr val="1F2937"/>
+              </a:solidFill>
+              <a:latin typeface="Calibri"/>
+            </a:endParaRPr>
+          </a:p>
+        </p:txBody>
+      </p:sp>
+      <p:graphicFrame>
+        <p:nvGraphicFramePr>
+          <p:cNvPr id="5" name="Table 4"/>
+          <p:cNvGraphicFramePr>
+            <a:graphicFrameLocks noGrp="1"/>
+          </p:cNvGraphicFramePr>
+          <p:nvPr/>
+        </p:nvGraphicFramePr>
+        <p:xfrm>
+          <a:off x="640080" y="1691640"/>
+          <a:ext cx="11338560" cy="4572000"/>
+        </p:xfrm>
+        <a:graphic>
+          <a:graphicData uri="http://schemas.openxmlformats.org/drawingml/2006/table">
+            <a:tbl>
+              <a:tblPr firstRow="1" bandRow="1">
+                <a:tableStyleId>{5C22544A-7EE6-4342-B048-85BDC9FD1C3A}</a:tableStyleId>
+              </a:tblPr>
+              <a:tblGrid>
+                <a:gridCol w="1965960">
+                  <a:extLst>
+                    <a:ext uri="{9D8B030D-6E8A-4147-A177-3AD203B41FA5}">
+                      <a16:colId xmlns:a16="http://schemas.microsoft.com/office/drawing/2014/main" val="20000"/>
+                    </a:ext>
+                  </a:extLst>
+                </a:gridCol>
+                <a:gridCol w="3246120">
+                  <a:extLst>
+                    <a:ext uri="{9D8B030D-6E8A-4147-A177-3AD203B41FA5}">
+                      <a16:colId xmlns:a16="http://schemas.microsoft.com/office/drawing/2014/main" val="20001"/>
+                    </a:ext>
+                  </a:extLst>
+                </a:gridCol>
+                <a:gridCol w="2560320">
+                  <a:extLst>
+                    <a:ext uri="{9D8B030D-6E8A-4147-A177-3AD203B41FA5}">
+                      <a16:colId xmlns:a16="http://schemas.microsoft.com/office/drawing/2014/main" val="20002"/>
+                    </a:ext>
+                  </a:extLst>
+                </a:gridCol>
+                <a:gridCol w="3566160">
+                  <a:extLst>
+                    <a:ext uri="{9D8B030D-6E8A-4147-A177-3AD203B41FA5}">
+                      <a16:colId xmlns:a16="http://schemas.microsoft.com/office/drawing/2014/main" val="20003"/>
+                    </a:ext>
+                  </a:extLst>
+                </a:gridCol>
+              </a:tblGrid>
+              <a:tr h="508000">
+                <a:tc>
+                  <a:txBody>
+                    <a:bodyPr/>
+                    <a:lstStyle/>
+                    <a:p>
+                      <a:r>
+                        <a:rPr sz="1100" b="1">
+                          <a:solidFill>
+                            <a:srgbClr val="FFFFFF"/>
+                          </a:solidFill>
+                          <a:latin typeface="Calibri"/>
+                        </a:rPr>
+                        <a:t>Test</a:t>
+                      </a:r>
+                    </a:p>
+                  </a:txBody>
+                  <a:tcPr marL="64008" marR="64008" marT="27432" marB="27432">
+                    <a:solidFill>
+                      <a:srgbClr val="4F46E5"/>
+                    </a:solidFill>
+                  </a:tcPr>
+                </a:tc>
+                <a:tc>
+                  <a:txBody>
+                    <a:bodyPr/>
+                    <a:lstStyle/>
+                    <a:p>
+                      <a:r>
+                        <a:rPr sz="1100" b="1">
+                          <a:solidFill>
+                            <a:srgbClr val="FFFFFF"/>
+                          </a:solidFill>
+                          <a:latin typeface="Calibri"/>
+                        </a:rPr>
+                        <a:t>Was geprüft</a:t>
+                      </a:r>
+                    </a:p>
+                  </a:txBody>
+                  <a:tcPr marL="64008" marR="64008" marT="27432" marB="27432">
+                    <a:solidFill>
+                      <a:srgbClr val="4F46E5"/>
+                    </a:solidFill>
+                  </a:tcPr>
+                </a:tc>
+                <a:tc>
+                  <a:txBody>
+                    <a:bodyPr/>
+                    <a:lstStyle/>
+                    <a:p>
+                      <a:r>
+                        <a:rPr sz="1100" b="1">
+                          <a:solidFill>
+                            <a:srgbClr val="FFFFFF"/>
+                          </a:solidFill>
+                          <a:latin typeface="Calibri"/>
+                        </a:rPr>
+                        <a:t>Warum</a:t>
+                      </a:r>
+                    </a:p>
+                  </a:txBody>
+                  <a:tcPr marL="64008" marR="64008" marT="27432" marB="27432">
+                    <a:solidFill>
+                      <a:srgbClr val="4F46E5"/>
+                    </a:solidFill>
+                  </a:tcPr>
+                </a:tc>
+                <a:tc>
+                  <a:txBody>
+                    <a:bodyPr/>
+                    <a:lstStyle/>
+                    <a:p>
+                      <a:r>
+                        <a:rPr sz="1100" b="1">
+                          <a:solidFill>
+                            <a:srgbClr val="FFFFFF"/>
+                          </a:solidFill>
+                          <a:latin typeface="Calibri"/>
+                        </a:rPr>
+                        <a:t>Wie getestet</a:t>
+                      </a:r>
+                    </a:p>
+                  </a:txBody>
+                  <a:tcPr marL="64008" marR="64008" marT="27432" marB="27432">
+                    <a:solidFill>
+                      <a:srgbClr val="4F46E5"/>
+                    </a:solidFill>
+                  </a:tcPr>
+                </a:tc>
+                <a:extLst>
+                  <a:ext uri="{0D108BD9-81ED-4DB2-BD59-A6C34878D82A}">
+                    <a16:rowId xmlns:a16="http://schemas.microsoft.com/office/drawing/2014/main" val="10000"/>
+                  </a:ext>
+                </a:extLst>
+              </a:tr>
+              <a:tr h="508000">
+                <a:tc>
+                  <a:txBody>
+                    <a:bodyPr/>
+                    <a:lstStyle/>
+                    <a:p>
+                      <a:r>
+                        <a:rPr sz="900" b="1">
+                          <a:solidFill>
+                            <a:srgbClr val="1F2937"/>
+                          </a:solidFill>
+                          <a:latin typeface="Calibri"/>
+                        </a:rPr>
+                        <a:t>Unit budget-settlement</a:t>
+                      </a:r>
+                    </a:p>
+                  </a:txBody>
+                  <a:tcPr marL="64008" marR="64008" marT="27432" marB="27432">
+                    <a:solidFill>
+                      <a:srgbClr val="FFFFFF"/>
+                    </a:solidFill>
+                  </a:tcPr>
+                </a:tc>
+                <a:tc>
+                  <a:txBody>
+                    <a:bodyPr/>
+                    <a:lstStyle/>
+                    <a:p>
+                      <a:r>
+                        <a:rPr sz="900" b="0">
+                          <a:solidFill>
+                            <a:srgbClr val="1F2937"/>
+                          </a:solidFill>
+                          <a:latin typeface="Calibri"/>
+                        </a:rPr>
+                        <a:t>Wer schuldet wem, Mehrzahler, 3-Wege-Rundung, Settle-up, Mehrwährung</a:t>
+                      </a:r>
+                    </a:p>
+                  </a:txBody>
+                  <a:tcPr marL="64008" marR="64008" marT="27432" marB="27432">
+                    <a:solidFill>
+                      <a:srgbClr val="FFFFFF"/>
+                    </a:solidFill>
+                  </a:tcPr>
+                </a:tc>
+                <a:tc>
+                  <a:txBody>
+                    <a:bodyPr/>
+                    <a:lstStyle/>
+                    <a:p>
+                      <a:r>
+                        <a:rPr sz="900" b="0">
+                          <a:solidFill>
+                            <a:srgbClr val="1F2937"/>
+                          </a:solidFill>
+                          <a:latin typeface="Calibri"/>
+                        </a:rPr>
+                        <a:t>Herz der Kostenteilung, ein Rundungsfehler bedeutet falsches Geld</a:t>
+                      </a:r>
+                    </a:p>
+                  </a:txBody>
+                  <a:tcPr marL="64008" marR="64008" marT="27432" marB="27432">
+                    <a:solidFill>
+                      <a:srgbClr val="FFFFFF"/>
+                    </a:solidFill>
+                  </a:tcPr>
+                </a:tc>
+                <a:tc>
+                  <a:txBody>
+                    <a:bodyPr/>
+                    <a:lstStyle/>
+                    <a:p>
+                      <a:r>
+                        <a:rPr sz="900" b="0">
+                          <a:solidFill>
+                            <a:srgbClr val="1F2937"/>
+                          </a:solidFill>
+                          <a:latin typeface="Calibri"/>
+                        </a:rPr>
+                        <a:t>Unit, DB gemockt, mehrere Szenarien gegen exakt erwartete Beträge</a:t>
+                      </a:r>
+                    </a:p>
+                  </a:txBody>
+                  <a:tcPr marL="64008" marR="64008" marT="27432" marB="27432">
+                    <a:solidFill>
+                      <a:srgbClr val="FFFFFF"/>
+                    </a:solidFill>
+                  </a:tcPr>
+                </a:tc>
+                <a:extLst>
+                  <a:ext uri="{0D108BD9-81ED-4DB2-BD59-A6C34878D82A}">
+                    <a16:rowId xmlns:a16="http://schemas.microsoft.com/office/drawing/2014/main" val="10001"/>
+                  </a:ext>
+                </a:extLst>
+              </a:tr>
+              <a:tr h="508000">
+                <a:tc>
+                  <a:txBody>
+                    <a:bodyPr/>
+                    <a:lstStyle/>
+                    <a:p>
+                      <a:r>
+                        <a:rPr sz="900" b="1">
+                          <a:solidFill>
+                            <a:srgbClr val="1F2937"/>
+                          </a:solidFill>
+                          <a:latin typeface="Calibri"/>
+                        </a:rPr>
+                        <a:t>Unit budget-summary</a:t>
+                      </a:r>
+                    </a:p>
+                  </a:txBody>
+                  <a:tcPr marL="64008" marR="64008" marT="27432" marB="27432">
+                    <a:solidFill>
+                      <a:srgbClr val="FFFFFF"/>
+                    </a:solidFill>
+                  </a:tcPr>
+                </a:tc>
+                <a:tc>
+                  <a:txBody>
+                    <a:bodyPr/>
+                    <a:lstStyle/>
+                    <a:p>
+                      <a:r>
+                        <a:rPr sz="900" b="0">
+                          <a:solidFill>
+                            <a:srgbClr val="1F2937"/>
+                          </a:solidFill>
+                          <a:latin typeface="Calibri"/>
+                        </a:rPr>
+                        <a:t>Pro-Person-Summe, bezahlte Anteile</a:t>
+                      </a:r>
+                    </a:p>
+                  </a:txBody>
+                  <a:tcPr marL="64008" marR="64008" marT="27432" marB="27432">
+                    <a:solidFill>
+                      <a:srgbClr val="FFFFFF"/>
+                    </a:solidFill>
+                  </a:tcPr>
+                </a:tc>
+                <a:tc>
+                  <a:txBody>
+                    <a:bodyPr/>
+                    <a:lstStyle/>
+                    <a:p>
+                      <a:r>
+                        <a:rPr sz="900" b="0">
+                          <a:solidFill>
+                            <a:srgbClr val="1F2937"/>
+                          </a:solidFill>
+                          <a:latin typeface="Calibri"/>
+                        </a:rPr>
+                        <a:t>Falsche Summen führen zu falscher Abrechnung</a:t>
+                      </a:r>
+                    </a:p>
+                  </a:txBody>
+                  <a:tcPr marL="64008" marR="64008" marT="27432" marB="27432">
+                    <a:solidFill>
+                      <a:srgbClr val="FFFFFF"/>
+                    </a:solidFill>
+                  </a:tcPr>
+                </a:tc>
+                <a:tc>
+                  <a:txBody>
+                    <a:bodyPr/>
+                    <a:lstStyle/>
+                    <a:p>
+                      <a:r>
+                        <a:rPr sz="900" b="0">
+                          <a:solidFill>
+                            <a:srgbClr val="1F2937"/>
+                          </a:solidFill>
+                          <a:latin typeface="Calibri"/>
+                        </a:rPr>
+                        <a:t>Unit, DB gemockt, Summen und paid-Anteile gegen Sollwerte</a:t>
+                      </a:r>
+                    </a:p>
+                  </a:txBody>
+                  <a:tcPr marL="64008" marR="64008" marT="27432" marB="27432">
+                    <a:solidFill>
+                      <a:srgbClr val="FFFFFF"/>
+                    </a:solidFill>
+                  </a:tcPr>
+                </a:tc>
+                <a:extLst>
+                  <a:ext uri="{0D108BD9-81ED-4DB2-BD59-A6C34878D82A}">
+                    <a16:rowId xmlns:a16="http://schemas.microsoft.com/office/drawing/2014/main" val="10002"/>
+                  </a:ext>
+                </a:extLst>
+              </a:tr>
+              <a:tr h="508000">
+                <a:tc>
+                  <a:txBody>
+                    <a:bodyPr/>
+                    <a:lstStyle/>
+                    <a:p>
+                      <a:r>
+                        <a:rPr sz="900" b="1">
+                          <a:solidFill>
+                            <a:srgbClr val="1F2937"/>
+                          </a:solidFill>
+                          <a:latin typeface="Calibri"/>
+                        </a:rPr>
+                        <a:t>Unit reservation</a:t>
+                      </a:r>
+                    </a:p>
+                  </a:txBody>
+                  <a:tcPr marL="64008" marR="64008" marT="27432" marB="27432">
+                    <a:solidFill>
+                      <a:srgbClr val="FFFFFF"/>
+                    </a:solidFill>
+                  </a:tcPr>
+                </a:tc>
+                <a:tc>
+                  <a:txBody>
+                    <a:bodyPr/>
+                    <a:lstStyle/>
+                    <a:p>
+                      <a:r>
+                        <a:rPr sz="900" b="0">
+                          <a:solidFill>
+                            <a:srgbClr val="1F2937"/>
+                          </a:solidFill>
+                          <a:latin typeface="Calibri"/>
+                        </a:rPr>
+                        <a:t>Tag-Zuordnung einer Buchung, Löschen</a:t>
+                      </a:r>
+                    </a:p>
+                  </a:txBody>
+                  <a:tcPr marL="64008" marR="64008" marT="27432" marB="27432">
+                    <a:solidFill>
+                      <a:srgbClr val="FFFFFF"/>
+                    </a:solidFill>
+                  </a:tcPr>
+                </a:tc>
+                <a:tc>
+                  <a:txBody>
+                    <a:bodyPr/>
+                    <a:lstStyle/>
+                    <a:p>
+                      <a:r>
+                        <a:rPr sz="900" b="0">
+                          <a:solidFill>
+                            <a:srgbClr val="1F2937"/>
+                          </a:solidFill>
+                          <a:latin typeface="Calibri"/>
+                        </a:rPr>
+                        <a:t>Buchung muss am richtigen Tag erscheinen</a:t>
+                      </a:r>
+                    </a:p>
+                  </a:txBody>
+                  <a:tcPr marL="64008" marR="64008" marT="27432" marB="27432">
+                    <a:solidFill>
+                      <a:srgbClr val="FFFFFF"/>
+                    </a:solidFill>
+                  </a:tcPr>
+                </a:tc>
+                <a:tc>
+                  <a:txBody>
+                    <a:bodyPr/>
+                    <a:lstStyle/>
+                    <a:p>
+                      <a:r>
+                        <a:rPr sz="900" b="0">
+                          <a:solidFill>
+                            <a:srgbClr val="1F2937"/>
+                          </a:solidFill>
+                          <a:latin typeface="Calibri"/>
+                        </a:rPr>
+                        <a:t>Unit, In-Memory-DB, Datumsgrenzen + Hotel-Sonderfall, Löschen prüft Rückgabewert</a:t>
+                      </a:r>
+                    </a:p>
+                  </a:txBody>
+                  <a:tcPr marL="64008" marR="64008" marT="27432" marB="27432">
+                    <a:solidFill>
+                      <a:srgbClr val="FFFFFF"/>
+                    </a:solidFill>
+                  </a:tcPr>
+                </a:tc>
+                <a:extLst>
+                  <a:ext uri="{0D108BD9-81ED-4DB2-BD59-A6C34878D82A}">
+                    <a16:rowId xmlns:a16="http://schemas.microsoft.com/office/drawing/2014/main" val="10003"/>
+                  </a:ext>
+                </a:extLst>
+              </a:tr>
+              <a:tr h="508000">
+                <a:tc>
+                  <a:txBody>
+                    <a:bodyPr/>
+                    <a:lstStyle/>
+                    <a:p>
+                      <a:r>
+                        <a:rPr sz="900" b="1">
+                          <a:solidFill>
+                            <a:srgbClr val="1F2937"/>
+                          </a:solidFill>
+                          <a:latin typeface="Calibri"/>
+                        </a:rPr>
+                        <a:t>Unit trip-generatedays</a:t>
+                      </a:r>
+                    </a:p>
+                  </a:txBody>
+                  <a:tcPr marL="64008" marR="64008" marT="27432" marB="27432">
+                    <a:solidFill>
+                      <a:srgbClr val="FFFFFF"/>
+                    </a:solidFill>
+                  </a:tcPr>
+                </a:tc>
+                <a:tc>
+                  <a:txBody>
+                    <a:bodyPr/>
+                    <a:lstStyle/>
+                    <a:p>
+                      <a:r>
+                        <a:rPr sz="900" b="0">
+                          <a:solidFill>
+                            <a:srgbClr val="1F2937"/>
+                          </a:solidFill>
+                          <a:latin typeface="Calibri"/>
+                        </a:rPr>
+                        <a:t>Tage aus Datumsbereich, Randfälle</a:t>
+                      </a:r>
+                    </a:p>
+                  </a:txBody>
+                  <a:tcPr marL="64008" marR="64008" marT="27432" marB="27432">
+                    <a:solidFill>
+                      <a:srgbClr val="FFFFFF"/>
+                    </a:solidFill>
+                  </a:tcPr>
+                </a:tc>
+                <a:tc>
+                  <a:txBody>
+                    <a:bodyPr/>
+                    <a:lstStyle/>
+                    <a:p>
+                      <a:r>
+                        <a:rPr sz="900" b="0">
+                          <a:solidFill>
+                            <a:srgbClr val="1F2937"/>
+                          </a:solidFill>
+                          <a:latin typeface="Calibri"/>
+                        </a:rPr>
+                        <a:t>Grundlage des gesamten Tagesplans</a:t>
+                      </a:r>
+                    </a:p>
+                  </a:txBody>
+                  <a:tcPr marL="64008" marR="64008" marT="27432" marB="27432">
+                    <a:solidFill>
+                      <a:srgbClr val="FFFFFF"/>
+                    </a:solidFill>
+                  </a:tcPr>
+                </a:tc>
+                <a:tc>
+                  <a:txBody>
+                    <a:bodyPr/>
+                    <a:lstStyle/>
+                    <a:p>
+                      <a:r>
+                        <a:rPr sz="900" b="0">
+                          <a:solidFill>
+                            <a:srgbClr val="1F2937"/>
+                          </a:solidFill>
+                          <a:latin typeface="Calibri"/>
+                        </a:rPr>
+                        <a:t>Unit, DB gemockt, 1-Tages-Trip, maxDays-Deckel, dateless-Plan neu datieren</a:t>
+                      </a:r>
+                    </a:p>
+                  </a:txBody>
+                  <a:tcPr marL="64008" marR="64008" marT="27432" marB="27432">
+                    <a:solidFill>
+                      <a:srgbClr val="FFFFFF"/>
+                    </a:solidFill>
+                  </a:tcPr>
+                </a:tc>
+                <a:extLst>
+                  <a:ext uri="{0D108BD9-81ED-4DB2-BD59-A6C34878D82A}">
+                    <a16:rowId xmlns:a16="http://schemas.microsoft.com/office/drawing/2014/main" val="10004"/>
+                  </a:ext>
+                </a:extLst>
+              </a:tr>
+              <a:tr h="508000">
+                <a:tc>
+                  <a:txBody>
+                    <a:bodyPr/>
+                    <a:lstStyle/>
+                    <a:p>
+                      <a:r>
+                        <a:rPr sz="900" b="1">
+                          <a:solidFill>
+                            <a:srgbClr val="1F2937"/>
+                          </a:solidFill>
+                          <a:latin typeface="Calibri"/>
+                        </a:rPr>
+                        <a:t>Unit formatters (Client)</a:t>
+                      </a:r>
+                    </a:p>
+                  </a:txBody>
+                  <a:tcPr marL="64008" marR="64008" marT="27432" marB="27432">
+                    <a:solidFill>
+                      <a:srgbClr val="FFFFFF"/>
+                    </a:solidFill>
+                  </a:tcPr>
+                </a:tc>
+                <a:tc>
+                  <a:txBody>
+                    <a:bodyPr/>
+                    <a:lstStyle/>
+                    <a:p>
+                      <a:r>
+                        <a:rPr sz="900" b="0">
+                          <a:solidFill>
+                            <a:srgbClr val="1F2937"/>
+                          </a:solidFill>
+                          <a:latin typeface="Calibri"/>
+                        </a:rPr>
+                        <a:t>Geld- und Ortsanzeige, dayTotalCost</a:t>
+                      </a:r>
+                    </a:p>
+                  </a:txBody>
+                  <a:tcPr marL="64008" marR="64008" marT="27432" marB="27432">
+                    <a:solidFill>
+                      <a:srgbClr val="FFFFFF"/>
+                    </a:solidFill>
+                  </a:tcPr>
+                </a:tc>
+                <a:tc>
+                  <a:txBody>
+                    <a:bodyPr/>
+                    <a:lstStyle/>
+                    <a:p>
+                      <a:r>
+                        <a:rPr sz="900" b="0">
+                          <a:solidFill>
+                            <a:srgbClr val="1F2937"/>
+                          </a:solidFill>
+                          <a:latin typeface="Calibri"/>
+                        </a:rPr>
+                        <a:t>Währung lokal korrekt darstellen</a:t>
+                      </a:r>
+                    </a:p>
+                  </a:txBody>
+                  <a:tcPr marL="64008" marR="64008" marT="27432" marB="27432">
+                    <a:solidFill>
+                      <a:srgbClr val="FFFFFF"/>
+                    </a:solidFill>
+                  </a:tcPr>
+                </a:tc>
+                <a:tc>
+                  <a:txBody>
+                    <a:bodyPr/>
+                    <a:lstStyle/>
+                    <a:p>
+                      <a:r>
+                        <a:rPr sz="900" b="0">
+                          <a:solidFill>
+                            <a:srgbClr val="1F2937"/>
+                          </a:solidFill>
+                          <a:latin typeface="Calibri"/>
+                        </a:rPr>
+                        <a:t>Unit (jsdom), reine Funktionen, mehrere Währungen und Locales, it.each</a:t>
+                      </a:r>
+                    </a:p>
+                  </a:txBody>
+                  <a:tcPr marL="64008" marR="64008" marT="27432" marB="27432">
+                    <a:solidFill>
+                      <a:srgbClr val="FFFFFF"/>
+                    </a:solidFill>
+                  </a:tcPr>
+                </a:tc>
+                <a:extLst>
+                  <a:ext uri="{0D108BD9-81ED-4DB2-BD59-A6C34878D82A}">
+                    <a16:rowId xmlns:a16="http://schemas.microsoft.com/office/drawing/2014/main" val="10005"/>
+                  </a:ext>
+                </a:extLst>
+              </a:tr>
+              <a:tr h="508000">
+                <a:tc>
+                  <a:txBody>
+                    <a:bodyPr/>
+                    <a:lstStyle/>
+                    <a:p>
+                      <a:r>
+                        <a:rPr sz="900" b="1">
+                          <a:solidFill>
+                            <a:srgbClr val="1F2937"/>
+                          </a:solidFill>
+                          <a:latin typeface="Calibri"/>
+                        </a:rPr>
+                        <a:t>Integration budget/places/trips</a:t>
+                      </a:r>
+                    </a:p>
+                  </a:txBody>
+                  <a:tcPr marL="64008" marR="64008" marT="27432" marB="27432">
+                    <a:solidFill>
+                      <a:srgbClr val="FFFFFF"/>
+                    </a:solidFill>
+                  </a:tcPr>
+                </a:tc>
+                <a:tc>
+                  <a:txBody>
+                    <a:bodyPr/>
+                    <a:lstStyle/>
+                    <a:p>
+                      <a:r>
+                        <a:rPr sz="900" b="0">
+                          <a:solidFill>
+                            <a:srgbClr val="1F2937"/>
+                          </a:solidFill>
+                          <a:latin typeface="Calibri"/>
+                        </a:rPr>
+                        <a:t>CRUD plus Berechtigungen (403/404), Nutzer-Isolation</a:t>
+                      </a:r>
+                    </a:p>
+                  </a:txBody>
+                  <a:tcPr marL="64008" marR="64008" marT="27432" marB="27432">
+                    <a:solidFill>
+                      <a:srgbClr val="FFFFFF"/>
+                    </a:solidFill>
+                  </a:tcPr>
+                </a:tc>
+                <a:tc>
+                  <a:txBody>
+                    <a:bodyPr/>
+                    <a:lstStyle/>
+                    <a:p>
+                      <a:r>
+                        <a:rPr sz="900" b="0">
+                          <a:solidFill>
+                            <a:srgbClr val="1F2937"/>
+                          </a:solidFill>
+                          <a:latin typeface="Calibri"/>
+                        </a:rPr>
+                        <a:t>Niemand darf fremde Daten sehen oder ändern</a:t>
+                      </a:r>
+                    </a:p>
+                  </a:txBody>
+                  <a:tcPr marL="64008" marR="64008" marT="27432" marB="27432">
+                    <a:solidFill>
+                      <a:srgbClr val="FFFFFF"/>
+                    </a:solidFill>
+                  </a:tcPr>
+                </a:tc>
+                <a:tc>
+                  <a:txBody>
+                    <a:bodyPr/>
+                    <a:lstStyle/>
+                    <a:p>
+                      <a:r>
+                        <a:rPr sz="900" b="0">
+                          <a:solidFill>
+                            <a:srgbClr val="1F2937"/>
+                          </a:solidFill>
+                          <a:latin typeface="Calibri"/>
+                        </a:rPr>
+                        <a:t>Supertest gegen echte NestApp, In-Memory-DB, Cookie je Rolle, Statuscodes geprüft</a:t>
+                      </a:r>
+                    </a:p>
+                  </a:txBody>
+                  <a:tcPr marL="64008" marR="64008" marT="27432" marB="27432">
+                    <a:solidFill>
+                      <a:srgbClr val="FFFFFF"/>
+                    </a:solidFill>
+                  </a:tcPr>
+                </a:tc>
+                <a:extLst>
+                  <a:ext uri="{0D108BD9-81ED-4DB2-BD59-A6C34878D82A}">
+                    <a16:rowId xmlns:a16="http://schemas.microsoft.com/office/drawing/2014/main" val="10006"/>
+                  </a:ext>
+                </a:extLst>
+              </a:tr>
+              <a:tr h="508000">
+                <a:tc>
+                  <a:txBody>
+                    <a:bodyPr/>
+                    <a:lstStyle/>
+                    <a:p>
+                      <a:r>
+                        <a:rPr sz="900" b="1">
+                          <a:solidFill>
+                            <a:srgbClr val="1F2937"/>
+                          </a:solidFill>
+                          <a:latin typeface="Calibri"/>
+                        </a:rPr>
+                        <a:t>E2E trip-create, planner-add</a:t>
+                      </a:r>
+                    </a:p>
+                  </a:txBody>
+                  <a:tcPr marL="64008" marR="64008" marT="27432" marB="27432">
+                    <a:solidFill>
+                      <a:srgbClr val="FFFFFF"/>
+                    </a:solidFill>
+                  </a:tcPr>
+                </a:tc>
+                <a:tc>
+                  <a:txBody>
+                    <a:bodyPr/>
+                    <a:lstStyle/>
+                    <a:p>
+                      <a:r>
+                        <a:rPr sz="900" b="0">
+                          <a:solidFill>
+                            <a:srgbClr val="1F2937"/>
+                          </a:solidFill>
+                          <a:latin typeface="Calibri"/>
+                        </a:rPr>
+                        <a:t>Trip anlegen, Ort im Planner hinzufügen</a:t>
+                      </a:r>
+                    </a:p>
+                  </a:txBody>
+                  <a:tcPr marL="64008" marR="64008" marT="27432" marB="27432">
+                    <a:solidFill>
+                      <a:srgbClr val="FFFFFF"/>
+                    </a:solidFill>
+                  </a:tcPr>
+                </a:tc>
+                <a:tc>
+                  <a:txBody>
+                    <a:bodyPr/>
+                    <a:lstStyle/>
+                    <a:p>
+                      <a:r>
+                        <a:rPr sz="900" b="0">
+                          <a:solidFill>
+                            <a:srgbClr val="1F2937"/>
+                          </a:solidFill>
+                          <a:latin typeface="Calibri"/>
+                        </a:rPr>
+                        <a:t>Der Hauptflow muss real funktionieren</a:t>
+                      </a:r>
+                    </a:p>
+                  </a:txBody>
+                  <a:tcPr marL="64008" marR="64008" marT="27432" marB="27432">
+                    <a:solidFill>
+                      <a:srgbClr val="FFFFFF"/>
+                    </a:solidFill>
+                  </a:tcPr>
+                </a:tc>
+                <a:tc>
+                  <a:txBody>
+                    <a:bodyPr/>
+                    <a:lstStyle/>
+                    <a:p>
+                      <a:r>
+                        <a:rPr sz="900" b="0">
+                          <a:solidFill>
+                            <a:srgbClr val="1F2937"/>
+                          </a:solidFill>
+                          <a:latin typeface="Calibri"/>
+                        </a:rPr>
+                        <a:t>Cypress im Browser gegen geseedetes Backend, anlegen, Reload, Element sichtbar</a:t>
+                      </a:r>
+                    </a:p>
+                  </a:txBody>
+                  <a:tcPr marL="64008" marR="64008" marT="27432" marB="27432">
+                    <a:solidFill>
+                      <a:srgbClr val="FFFFFF"/>
+                    </a:solidFill>
+                  </a:tcPr>
+                </a:tc>
+                <a:extLst>
+                  <a:ext uri="{0D108BD9-81ED-4DB2-BD59-A6C34878D82A}">
+                    <a16:rowId xmlns:a16="http://schemas.microsoft.com/office/drawing/2014/main" val="10007"/>
+                  </a:ext>
+                </a:extLst>
+              </a:tr>
+              <a:tr h="508000">
+                <a:tc>
+                  <a:txBody>
+                    <a:bodyPr/>
+                    <a:lstStyle/>
+                    <a:p>
+                      <a:r>
+                        <a:rPr sz="900" b="1">
+                          <a:solidFill>
+                            <a:srgbClr val="1F2937"/>
+                          </a:solidFill>
+                          <a:latin typeface="Calibri"/>
+                        </a:rPr>
+                        <a:t>Load trips-read</a:t>
+                      </a:r>
+                    </a:p>
+                  </a:txBody>
+                  <a:tcPr marL="64008" marR="64008" marT="27432" marB="27432">
+                    <a:solidFill>
+                      <a:srgbClr val="FFFFFF"/>
+                    </a:solidFill>
+                  </a:tcPr>
+                </a:tc>
+                <a:tc>
+                  <a:txBody>
+                    <a:bodyPr/>
+                    <a:lstStyle/>
+                    <a:p>
+                      <a:r>
+                        <a:rPr sz="900" b="0">
+                          <a:solidFill>
+                            <a:srgbClr val="1F2937"/>
+                          </a:solidFill>
+                          <a:latin typeface="Calibri"/>
+                        </a:rPr>
+                        <a:t>Lese-Latenz unter steigender Last</a:t>
+                      </a:r>
+                    </a:p>
+                  </a:txBody>
+                  <a:tcPr marL="64008" marR="64008" marT="27432" marB="27432">
+                    <a:solidFill>
+                      <a:srgbClr val="FFFFFF"/>
+                    </a:solidFill>
+                  </a:tcPr>
+                </a:tc>
+                <a:tc>
+                  <a:txBody>
+                    <a:bodyPr/>
+                    <a:lstStyle/>
+                    <a:p>
+                      <a:r>
+                        <a:rPr sz="900" b="0">
+                          <a:solidFill>
+                            <a:srgbClr val="1F2937"/>
+                          </a:solidFill>
+                          <a:latin typeface="Calibri"/>
+                        </a:rPr>
+                        <a:t>Bleibt Browsen unter Last schnell?</a:t>
+                      </a:r>
+                    </a:p>
+                  </a:txBody>
+                  <a:tcPr marL="64008" marR="64008" marT="27432" marB="27432">
+                    <a:solidFill>
+                      <a:srgbClr val="FFFFFF"/>
+                    </a:solidFill>
+                  </a:tcPr>
+                </a:tc>
+                <a:tc>
+                  <a:txBody>
+                    <a:bodyPr/>
+                    <a:lstStyle/>
+                    <a:p>
+                      <a:r>
+                        <a:rPr sz="900" b="0">
+                          <a:solidFill>
+                            <a:srgbClr val="1F2937"/>
+                          </a:solidFill>
+                          <a:latin typeface="Calibri"/>
+                        </a:rPr>
+                        <a:t>k6 Ramp bis 20 VUs, Bearer-Token, p95- und Fehler-Schwellen pro Endpoint</a:t>
+                      </a:r>
+                    </a:p>
+                  </a:txBody>
+                  <a:tcPr marL="64008" marR="64008" marT="27432" marB="27432">
+                    <a:solidFill>
+                      <a:srgbClr val="FFFFFF"/>
+                    </a:solidFill>
+                  </a:tcPr>
+                </a:tc>
+                <a:extLst>
+                  <a:ext uri="{0D108BD9-81ED-4DB2-BD59-A6C34878D82A}">
+                    <a16:rowId xmlns:a16="http://schemas.microsoft.com/office/drawing/2014/main" val="10008"/>
+                  </a:ext>
+                </a:extLst>
+              </a:tr>
+            </a:tbl>
+          </a:graphicData>
+        </a:graphic>
+      </p:graphicFrame>
+      <p:sp>
+        <p:nvSpPr>
+          <p:cNvPr id="6" name="TextBox 5"/>
           <p:cNvSpPr txBox="1"/>
           <p:nvPr/>
         </p:nvSpPr>
         <p:spPr>
           <a:xfrm>
-            <a:off x="640080" y="1874519"/>
-            <a:ext cx="10972800" cy="4297680"/>
+            <a:off x="457200" y="6419088"/>
+            <a:ext cx="813043" cy="246221"/>
           </a:xfrm>
           <a:prstGeom prst="rect">
             <a:avLst/>
@@ -7105,150 +7254,6 @@
           <a:noFill/>
         </p:spPr>
         <p:txBody>
-          <a:bodyPr wrap="square">
-            <a:spAutoFit/>
-          </a:bodyPr>
-          <a:lstStyle/>
-          <a:p>
-            <a:pPr>
-              <a:spcBef>
-                <a:spcPts val="600"/>
-              </a:spcBef>
-              <a:spcAft>
-                <a:spcPts val="800"/>
-              </a:spcAft>
-            </a:pPr>
-            <a:r>
-              <a:rPr sz="1800" b="1">
-                <a:solidFill>
-                  <a:srgbClr val="4F46E5"/>
-                </a:solidFill>
-                <a:latin typeface="Calibri"/>
-              </a:rPr>
-              <a:t>Unit (Kern-Geschäftslogik)</a:t>
-            </a:r>
-          </a:p>
-          <a:p>
-            <a:pPr>
-              <a:spcAft>
-                <a:spcPts val="800"/>
-              </a:spcAft>
-            </a:pPr>
-            <a:r>
-              <a:rPr sz="2000" b="0">
-                <a:solidFill>
-                  <a:srgbClr val="4B5563"/>
-                </a:solidFill>
-                <a:latin typeface="Calibri"/>
-              </a:rPr>
-              <a:t>▸  Settlement: wer schuldet wem, Mehrwährung, 3-Wege-Rundung</a:t>
-            </a:r>
-          </a:p>
-          <a:p>
-            <a:pPr>
-              <a:spcAft>
-                <a:spcPts val="800"/>
-              </a:spcAft>
-            </a:pPr>
-            <a:r>
-              <a:rPr sz="2000" b="0">
-                <a:solidFill>
-                  <a:srgbClr val="4B5563"/>
-                </a:solidFill>
-                <a:latin typeface="Calibri"/>
-              </a:rPr>
-              <a:t>▸  Tagesgenerierung aus Datumsbereich, Reservierungs-Tagzuordnung</a:t>
-            </a:r>
-          </a:p>
-          <a:p>
-            <a:pPr>
-              <a:spcBef>
-                <a:spcPts val="600"/>
-              </a:spcBef>
-              <a:spcAft>
-                <a:spcPts val="800"/>
-              </a:spcAft>
-            </a:pPr>
-            <a:r>
-              <a:rPr sz="1800" b="1">
-                <a:solidFill>
-                  <a:srgbClr val="4F46E5"/>
-                </a:solidFill>
-                <a:latin typeface="Calibri"/>
-              </a:rPr>
-              <a:t>Integration</a:t>
-            </a:r>
-          </a:p>
-          <a:p>
-            <a:pPr>
-              <a:spcAft>
-                <a:spcPts val="800"/>
-              </a:spcAft>
-            </a:pPr>
-            <a:r>
-              <a:rPr sz="2000" b="0">
-                <a:solidFill>
-                  <a:srgbClr val="4B5563"/>
-                </a:solidFill>
-                <a:latin typeface="Calibri"/>
-              </a:rPr>
-              <a:t>▸  Budget-, Places-, Trips-API mit Permission-Pfaden (403/404) und Isolation</a:t>
-            </a:r>
-          </a:p>
-          <a:p>
-            <a:pPr>
-              <a:spcBef>
-                <a:spcPts val="600"/>
-              </a:spcBef>
-              <a:spcAft>
-                <a:spcPts val="800"/>
-              </a:spcAft>
-            </a:pPr>
-            <a:r>
-              <a:rPr sz="1800" b="1">
-                <a:solidFill>
-                  <a:srgbClr val="4F46E5"/>
-                </a:solidFill>
-                <a:latin typeface="Calibri"/>
-              </a:rPr>
-              <a:t>E2E</a:t>
-            </a:r>
-          </a:p>
-          <a:p>
-            <a:pPr>
-              <a:spcAft>
-                <a:spcPts val="800"/>
-              </a:spcAft>
-            </a:pPr>
-            <a:r>
-              <a:rPr sz="2000" b="0">
-                <a:solidFill>
-                  <a:srgbClr val="4B5563"/>
-                </a:solidFill>
-                <a:latin typeface="Calibri"/>
-              </a:rPr>
-              <a:t>▸  Trip anlegen, Place im Planner hinzufügen, Persistenz nach Reload</a:t>
-            </a:r>
-          </a:p>
-        </p:txBody>
-      </p:sp>
-      <p:sp>
-        <p:nvSpPr>
-          <p:cNvPr id="6" name="TextBox 5"/>
-          <p:cNvSpPr txBox="1"/>
-          <p:nvPr/>
-        </p:nvSpPr>
-        <p:spPr>
-          <a:xfrm>
-            <a:off x="457200" y="6419088"/>
-            <a:ext cx="813043" cy="246221"/>
-          </a:xfrm>
-          <a:prstGeom prst="rect">
-            <a:avLst/>
-          </a:prstGeom>
-          <a:noFill/>
-        </p:spPr>
-        <p:txBody>
           <a:bodyPr wrap="none">
             <a:spAutoFit/>
           </a:bodyPr>
@@ -7261,16 +7266,16 @@
                 </a:solidFill>
                 <a:latin typeface="Calibri"/>
               </a:rPr>
-              <a:t>TREK</a:t>
-            </a:r>
-            <a:r>
-              <a:rPr lang="de-AT" sz="1000" b="0" dirty="0">
+              <a:t>TREK </a:t>
+            </a:r>
+            <a:r>
+              <a:rPr lang="de-AT" sz="1000" dirty="0">
                 <a:solidFill>
                   <a:srgbClr val="6B7280"/>
                 </a:solidFill>
                 <a:latin typeface="Calibri"/>
               </a:rPr>
-              <a:t> | WAT</a:t>
+              <a:t>| WAT</a:t>
             </a:r>
             <a:endParaRPr sz="1000" b="0" dirty="0">
               <a:solidFill>
@@ -7428,7 +7433,7 @@
         <p:spPr>
           <a:xfrm>
             <a:off x="640080" y="841248"/>
-            <a:ext cx="11155680" cy="914400"/>
+            <a:ext cx="3139577" cy="569387"/>
           </a:xfrm>
           <a:prstGeom prst="rect">
             <a:avLst/>
@@ -7442,161 +7447,957 @@
           <a:lstStyle/>
           <a:p>
             <a:r>
-              <a:rPr sz="3100" b="1">
+              <a:rPr sz="3100" b="1" dirty="0">
                 <a:solidFill>
                   <a:srgbClr val="1F2937"/>
                 </a:solidFill>
                 <a:latin typeface="Calibri"/>
               </a:rPr>
-              <a:t>Was und warum: Fabian</a:t>
-            </a:r>
-          </a:p>
-        </p:txBody>
-      </p:sp>
-      <p:sp>
-        <p:nvSpPr>
-          <p:cNvPr id="5" name="TextBox 4"/>
-          <p:cNvSpPr txBox="1"/>
+              <a:t>Was, </a:t>
+            </a:r>
+            <a:r>
+              <a:rPr sz="3100" b="1" dirty="0" err="1">
+                <a:solidFill>
+                  <a:srgbClr val="1F2937"/>
+                </a:solidFill>
+                <a:latin typeface="Calibri"/>
+              </a:rPr>
+              <a:t>warum</a:t>
+            </a:r>
+            <a:r>
+              <a:rPr sz="3100" b="1" dirty="0">
+                <a:solidFill>
+                  <a:srgbClr val="1F2937"/>
+                </a:solidFill>
+                <a:latin typeface="Calibri"/>
+              </a:rPr>
+              <a:t>, </a:t>
+            </a:r>
+            <a:r>
+              <a:rPr sz="3100" b="1" dirty="0" err="1">
+                <a:solidFill>
+                  <a:srgbClr val="1F2937"/>
+                </a:solidFill>
+                <a:latin typeface="Calibri"/>
+              </a:rPr>
+              <a:t>wie</a:t>
+            </a:r>
+            <a:endParaRPr sz="3100" b="1" dirty="0">
+              <a:solidFill>
+                <a:srgbClr val="1F2937"/>
+              </a:solidFill>
+              <a:latin typeface="Calibri"/>
+            </a:endParaRPr>
+          </a:p>
+        </p:txBody>
+      </p:sp>
+      <p:graphicFrame>
+        <p:nvGraphicFramePr>
+          <p:cNvPr id="5" name="Table 4"/>
+          <p:cNvGraphicFramePr>
+            <a:graphicFrameLocks noGrp="1"/>
+          </p:cNvGraphicFramePr>
           <p:nvPr/>
-        </p:nvSpPr>
-        <p:spPr>
-          <a:xfrm>
-            <a:off x="640080" y="1874519"/>
-            <a:ext cx="10972800" cy="4297680"/>
-          </a:xfrm>
-          <a:prstGeom prst="rect">
-            <a:avLst/>
-          </a:prstGeom>
-          <a:noFill/>
-        </p:spPr>
-        <p:txBody>
-          <a:bodyPr wrap="square">
-            <a:spAutoFit/>
-          </a:bodyPr>
-          <a:lstStyle/>
-          <a:p>
-            <a:pPr>
-              <a:spcBef>
-                <a:spcPts val="600"/>
-              </a:spcBef>
-              <a:spcAft>
-                <a:spcPts val="800"/>
-              </a:spcAft>
-            </a:pPr>
-            <a:r>
-              <a:rPr sz="1800" b="1">
-                <a:solidFill>
-                  <a:srgbClr val="4F46E5"/>
-                </a:solidFill>
-                <a:latin typeface="Calibri"/>
-              </a:rPr>
-              <a:t>Unit (Kern-Geschäftslogik)</a:t>
-            </a:r>
-          </a:p>
-          <a:p>
-            <a:pPr>
-              <a:spcAft>
-                <a:spcPts val="800"/>
-              </a:spcAft>
-            </a:pPr>
-            <a:r>
-              <a:rPr sz="2000" b="0">
-                <a:solidFill>
-                  <a:srgbClr val="4B5563"/>
-                </a:solidFill>
-                <a:latin typeface="Calibri"/>
-              </a:rPr>
-              <a:t>▸  Währungsumrechnung mit Caching und Fallback, Passwort-Policy (Security)</a:t>
-            </a:r>
-          </a:p>
-          <a:p>
-            <a:pPr>
-              <a:spcAft>
-                <a:spcPts val="800"/>
-              </a:spcAft>
-            </a:pPr>
-            <a:r>
-              <a:rPr sz="2000" b="0">
-                <a:solidFill>
-                  <a:srgbClr val="4B5563"/>
-                </a:solidFill>
-                <a:latin typeface="Calibri"/>
-              </a:rPr>
-              <a:t>▸  Flugdistanz (Haversine), Urlaubsstatistik, Journey-Lifecycle</a:t>
-            </a:r>
-          </a:p>
-          <a:p>
-            <a:pPr>
-              <a:spcBef>
-                <a:spcPts val="600"/>
-              </a:spcBef>
-              <a:spcAft>
-                <a:spcPts val="800"/>
-              </a:spcAft>
-            </a:pPr>
-            <a:r>
-              <a:rPr sz="1800" b="1">
-                <a:solidFill>
-                  <a:srgbClr val="4F46E5"/>
-                </a:solidFill>
-                <a:latin typeface="Calibri"/>
-              </a:rPr>
-              <a:t>Integration</a:t>
-            </a:r>
-          </a:p>
-          <a:p>
-            <a:pPr>
-              <a:spcAft>
-                <a:spcPts val="800"/>
-              </a:spcAft>
-            </a:pPr>
-            <a:r>
-              <a:rPr sz="2000" b="0">
-                <a:solidFill>
-                  <a:srgbClr val="4B5563"/>
-                </a:solidFill>
-                <a:latin typeface="Calibri"/>
-              </a:rPr>
-              <a:t>▸  Login setzt Session und schaltet /me frei, Falsch-Login 401, Vacay-Toggle</a:t>
-            </a:r>
-          </a:p>
-          <a:p>
-            <a:pPr>
-              <a:spcBef>
-                <a:spcPts val="600"/>
-              </a:spcBef>
-              <a:spcAft>
-                <a:spcPts val="800"/>
-              </a:spcAft>
-            </a:pPr>
-            <a:r>
-              <a:rPr sz="1800" b="1">
-                <a:solidFill>
-                  <a:srgbClr val="4F46E5"/>
-                </a:solidFill>
-                <a:latin typeface="Calibri"/>
-              </a:rPr>
-              <a:t>E2E</a:t>
-            </a:r>
-          </a:p>
-          <a:p>
-            <a:pPr>
-              <a:spcAft>
-                <a:spcPts val="800"/>
-              </a:spcAft>
-            </a:pPr>
-            <a:r>
-              <a:rPr sz="2000" b="0">
-                <a:solidFill>
-                  <a:srgbClr val="4B5563"/>
-                </a:solidFill>
-                <a:latin typeface="Calibri"/>
-              </a:rPr>
-              <a:t>▸  Falsch-Login zeigt Fehler, eingeloggte Session erreicht das Dashboard</a:t>
-            </a:r>
-          </a:p>
-        </p:txBody>
-      </p:sp>
+        </p:nvGraphicFramePr>
+        <p:xfrm>
+          <a:off x="640080" y="1691640"/>
+          <a:ext cx="11338560" cy="4572000"/>
+        </p:xfrm>
+        <a:graphic>
+          <a:graphicData uri="http://schemas.openxmlformats.org/drawingml/2006/table">
+            <a:tbl>
+              <a:tblPr firstRow="1" bandRow="1">
+                <a:tableStyleId>{5C22544A-7EE6-4342-B048-85BDC9FD1C3A}</a:tableStyleId>
+              </a:tblPr>
+              <a:tblGrid>
+                <a:gridCol w="1965960">
+                  <a:extLst>
+                    <a:ext uri="{9D8B030D-6E8A-4147-A177-3AD203B41FA5}">
+                      <a16:colId xmlns:a16="http://schemas.microsoft.com/office/drawing/2014/main" val="20000"/>
+                    </a:ext>
+                  </a:extLst>
+                </a:gridCol>
+                <a:gridCol w="3246120">
+                  <a:extLst>
+                    <a:ext uri="{9D8B030D-6E8A-4147-A177-3AD203B41FA5}">
+                      <a16:colId xmlns:a16="http://schemas.microsoft.com/office/drawing/2014/main" val="20001"/>
+                    </a:ext>
+                  </a:extLst>
+                </a:gridCol>
+                <a:gridCol w="2560320">
+                  <a:extLst>
+                    <a:ext uri="{9D8B030D-6E8A-4147-A177-3AD203B41FA5}">
+                      <a16:colId xmlns:a16="http://schemas.microsoft.com/office/drawing/2014/main" val="20002"/>
+                    </a:ext>
+                  </a:extLst>
+                </a:gridCol>
+                <a:gridCol w="3566160">
+                  <a:extLst>
+                    <a:ext uri="{9D8B030D-6E8A-4147-A177-3AD203B41FA5}">
+                      <a16:colId xmlns:a16="http://schemas.microsoft.com/office/drawing/2014/main" val="20003"/>
+                    </a:ext>
+                  </a:extLst>
+                </a:gridCol>
+              </a:tblGrid>
+              <a:tr h="508000">
+                <a:tc>
+                  <a:txBody>
+                    <a:bodyPr/>
+                    <a:lstStyle/>
+                    <a:p>
+                      <a:r>
+                        <a:rPr sz="1100" b="1">
+                          <a:solidFill>
+                            <a:srgbClr val="FFFFFF"/>
+                          </a:solidFill>
+                          <a:latin typeface="Calibri"/>
+                        </a:rPr>
+                        <a:t>Test</a:t>
+                      </a:r>
+                    </a:p>
+                  </a:txBody>
+                  <a:tcPr marL="64008" marR="64008" marT="27432" marB="27432">
+                    <a:solidFill>
+                      <a:srgbClr val="4F46E5"/>
+                    </a:solidFill>
+                  </a:tcPr>
+                </a:tc>
+                <a:tc>
+                  <a:txBody>
+                    <a:bodyPr/>
+                    <a:lstStyle/>
+                    <a:p>
+                      <a:r>
+                        <a:rPr sz="1100" b="1">
+                          <a:solidFill>
+                            <a:srgbClr val="FFFFFF"/>
+                          </a:solidFill>
+                          <a:latin typeface="Calibri"/>
+                        </a:rPr>
+                        <a:t>Was geprüft</a:t>
+                      </a:r>
+                    </a:p>
+                  </a:txBody>
+                  <a:tcPr marL="64008" marR="64008" marT="27432" marB="27432">
+                    <a:solidFill>
+                      <a:srgbClr val="4F46E5"/>
+                    </a:solidFill>
+                  </a:tcPr>
+                </a:tc>
+                <a:tc>
+                  <a:txBody>
+                    <a:bodyPr/>
+                    <a:lstStyle/>
+                    <a:p>
+                      <a:r>
+                        <a:rPr sz="1100" b="1">
+                          <a:solidFill>
+                            <a:srgbClr val="FFFFFF"/>
+                          </a:solidFill>
+                          <a:latin typeface="Calibri"/>
+                        </a:rPr>
+                        <a:t>Warum</a:t>
+                      </a:r>
+                    </a:p>
+                  </a:txBody>
+                  <a:tcPr marL="64008" marR="64008" marT="27432" marB="27432">
+                    <a:solidFill>
+                      <a:srgbClr val="4F46E5"/>
+                    </a:solidFill>
+                  </a:tcPr>
+                </a:tc>
+                <a:tc>
+                  <a:txBody>
+                    <a:bodyPr/>
+                    <a:lstStyle/>
+                    <a:p>
+                      <a:r>
+                        <a:rPr sz="1100" b="1">
+                          <a:solidFill>
+                            <a:srgbClr val="FFFFFF"/>
+                          </a:solidFill>
+                          <a:latin typeface="Calibri"/>
+                        </a:rPr>
+                        <a:t>Wie getestet</a:t>
+                      </a:r>
+                    </a:p>
+                  </a:txBody>
+                  <a:tcPr marL="64008" marR="64008" marT="27432" marB="27432">
+                    <a:solidFill>
+                      <a:srgbClr val="4F46E5"/>
+                    </a:solidFill>
+                  </a:tcPr>
+                </a:tc>
+                <a:extLst>
+                  <a:ext uri="{0D108BD9-81ED-4DB2-BD59-A6C34878D82A}">
+                    <a16:rowId xmlns:a16="http://schemas.microsoft.com/office/drawing/2014/main" val="10000"/>
+                  </a:ext>
+                </a:extLst>
+              </a:tr>
+              <a:tr h="508000">
+                <a:tc>
+                  <a:txBody>
+                    <a:bodyPr/>
+                    <a:lstStyle/>
+                    <a:p>
+                      <a:r>
+                        <a:rPr sz="900" b="1">
+                          <a:solidFill>
+                            <a:srgbClr val="1F2937"/>
+                          </a:solidFill>
+                          <a:latin typeface="Calibri"/>
+                        </a:rPr>
+                        <a:t>Unit exchangeRateService</a:t>
+                      </a:r>
+                    </a:p>
+                  </a:txBody>
+                  <a:tcPr marL="64008" marR="64008" marT="27432" marB="27432">
+                    <a:solidFill>
+                      <a:srgbClr val="FFFFFF"/>
+                    </a:solidFill>
+                  </a:tcPr>
+                </a:tc>
+                <a:tc>
+                  <a:txBody>
+                    <a:bodyPr/>
+                    <a:lstStyle/>
+                    <a:p>
+                      <a:r>
+                        <a:rPr sz="900" b="0">
+                          <a:solidFill>
+                            <a:srgbClr val="1F2937"/>
+                          </a:solidFill>
+                          <a:latin typeface="Calibri"/>
+                        </a:rPr>
+                        <a:t>Kurse holen, cachen, Fehler abfangen</a:t>
+                      </a:r>
+                    </a:p>
+                  </a:txBody>
+                  <a:tcPr marL="64008" marR="64008" marT="27432" marB="27432">
+                    <a:solidFill>
+                      <a:srgbClr val="FFFFFF"/>
+                    </a:solidFill>
+                  </a:tcPr>
+                </a:tc>
+                <a:tc>
+                  <a:txBody>
+                    <a:bodyPr/>
+                    <a:lstStyle/>
+                    <a:p>
+                      <a:r>
+                        <a:rPr sz="900" b="0">
+                          <a:solidFill>
+                            <a:srgbClr val="1F2937"/>
+                          </a:solidFill>
+                          <a:latin typeface="Calibri"/>
+                        </a:rPr>
+                        <a:t>Basis der Umrechnung, darf bei Ausfall nicht crashen</a:t>
+                      </a:r>
+                    </a:p>
+                  </a:txBody>
+                  <a:tcPr marL="64008" marR="64008" marT="27432" marB="27432">
+                    <a:solidFill>
+                      <a:srgbClr val="FFFFFF"/>
+                    </a:solidFill>
+                  </a:tcPr>
+                </a:tc>
+                <a:tc>
+                  <a:txBody>
+                    <a:bodyPr/>
+                    <a:lstStyle/>
+                    <a:p>
+                      <a:r>
+                        <a:rPr sz="900" b="0">
+                          <a:solidFill>
+                            <a:srgbClr val="1F2937"/>
+                          </a:solidFill>
+                          <a:latin typeface="Calibri"/>
+                        </a:rPr>
+                        <a:t>Unit, global fetch via jest.spyOn gemockt, resetModules gegen Cache, Erfolg/Fehler/Cache-Treffer</a:t>
+                      </a:r>
+                    </a:p>
+                  </a:txBody>
+                  <a:tcPr marL="64008" marR="64008" marT="27432" marB="27432">
+                    <a:solidFill>
+                      <a:srgbClr val="FFFFFF"/>
+                    </a:solidFill>
+                  </a:tcPr>
+                </a:tc>
+                <a:extLst>
+                  <a:ext uri="{0D108BD9-81ED-4DB2-BD59-A6C34878D82A}">
+                    <a16:rowId xmlns:a16="http://schemas.microsoft.com/office/drawing/2014/main" val="10001"/>
+                  </a:ext>
+                </a:extLst>
+              </a:tr>
+              <a:tr h="508000">
+                <a:tc>
+                  <a:txBody>
+                    <a:bodyPr/>
+                    <a:lstStyle/>
+                    <a:p>
+                      <a:r>
+                        <a:rPr sz="900" b="1">
+                          <a:solidFill>
+                            <a:srgbClr val="1F2937"/>
+                          </a:solidFill>
+                          <a:latin typeface="Calibri"/>
+                        </a:rPr>
+                        <a:t>Unit passwordPolicy</a:t>
+                      </a:r>
+                    </a:p>
+                  </a:txBody>
+                  <a:tcPr marL="64008" marR="64008" marT="27432" marB="27432">
+                    <a:solidFill>
+                      <a:srgbClr val="FFFFFF"/>
+                    </a:solidFill>
+                  </a:tcPr>
+                </a:tc>
+                <a:tc>
+                  <a:txBody>
+                    <a:bodyPr/>
+                    <a:lstStyle/>
+                    <a:p>
+                      <a:r>
+                        <a:rPr sz="900" b="0">
+                          <a:solidFill>
+                            <a:srgbClr val="1F2937"/>
+                          </a:solidFill>
+                          <a:latin typeface="Calibri"/>
+                        </a:rPr>
+                        <a:t>Längen-, Komplexitäts-, Common-Regeln</a:t>
+                      </a:r>
+                    </a:p>
+                  </a:txBody>
+                  <a:tcPr marL="64008" marR="64008" marT="27432" marB="27432">
+                    <a:solidFill>
+                      <a:srgbClr val="FFFFFF"/>
+                    </a:solidFill>
+                  </a:tcPr>
+                </a:tc>
+                <a:tc>
+                  <a:txBody>
+                    <a:bodyPr/>
+                    <a:lstStyle/>
+                    <a:p>
+                      <a:r>
+                        <a:rPr sz="900" b="0">
+                          <a:solidFill>
+                            <a:srgbClr val="1F2937"/>
+                          </a:solidFill>
+                          <a:latin typeface="Calibri"/>
+                        </a:rPr>
+                        <a:t>Security, schwache Passwörter ablehnen</a:t>
+                      </a:r>
+                    </a:p>
+                  </a:txBody>
+                  <a:tcPr marL="64008" marR="64008" marT="27432" marB="27432">
+                    <a:solidFill>
+                      <a:srgbClr val="FFFFFF"/>
+                    </a:solidFill>
+                  </a:tcPr>
+                </a:tc>
+                <a:tc>
+                  <a:txBody>
+                    <a:bodyPr/>
+                    <a:lstStyle/>
+                    <a:p>
+                      <a:r>
+                        <a:rPr sz="900" b="0">
+                          <a:solidFill>
+                            <a:srgbClr val="1F2937"/>
+                          </a:solidFill>
+                          <a:latin typeface="Calibri"/>
+                        </a:rPr>
+                        <a:t>Unit, reine Funktion, parametrisiert via it.each (1 gültig + 8 Ablehnungsgründe)</a:t>
+                      </a:r>
+                    </a:p>
+                  </a:txBody>
+                  <a:tcPr marL="64008" marR="64008" marT="27432" marB="27432">
+                    <a:solidFill>
+                      <a:srgbClr val="FFFFFF"/>
+                    </a:solidFill>
+                  </a:tcPr>
+                </a:tc>
+                <a:extLst>
+                  <a:ext uri="{0D108BD9-81ED-4DB2-BD59-A6C34878D82A}">
+                    <a16:rowId xmlns:a16="http://schemas.microsoft.com/office/drawing/2014/main" val="10002"/>
+                  </a:ext>
+                </a:extLst>
+              </a:tr>
+              <a:tr h="508000">
+                <a:tc>
+                  <a:txBody>
+                    <a:bodyPr/>
+                    <a:lstStyle/>
+                    <a:p>
+                      <a:r>
+                        <a:rPr sz="900" b="1">
+                          <a:solidFill>
+                            <a:srgbClr val="1F2937"/>
+                          </a:solidFill>
+                          <a:latin typeface="Calibri"/>
+                        </a:rPr>
+                        <a:t>Unit distanceService</a:t>
+                      </a:r>
+                    </a:p>
+                  </a:txBody>
+                  <a:tcPr marL="64008" marR="64008" marT="27432" marB="27432">
+                    <a:solidFill>
+                      <a:srgbClr val="FFFFFF"/>
+                    </a:solidFill>
+                  </a:tcPr>
+                </a:tc>
+                <a:tc>
+                  <a:txBody>
+                    <a:bodyPr/>
+                    <a:lstStyle/>
+                    <a:p>
+                      <a:r>
+                        <a:rPr sz="900" b="0">
+                          <a:solidFill>
+                            <a:srgbClr val="1F2937"/>
+                          </a:solidFill>
+                          <a:latin typeface="Calibri"/>
+                        </a:rPr>
+                        <a:t>Flugdistanz (Haversine), Stornos ignorieren</a:t>
+                      </a:r>
+                    </a:p>
+                  </a:txBody>
+                  <a:tcPr marL="64008" marR="64008" marT="27432" marB="27432">
+                    <a:solidFill>
+                      <a:srgbClr val="FFFFFF"/>
+                    </a:solidFill>
+                  </a:tcPr>
+                </a:tc>
+                <a:tc>
+                  <a:txBody>
+                    <a:bodyPr/>
+                    <a:lstStyle/>
+                    <a:p>
+                      <a:r>
+                        <a:rPr sz="900" b="0">
+                          <a:solidFill>
+                            <a:srgbClr val="1F2937"/>
+                          </a:solidFill>
+                          <a:latin typeface="Calibri"/>
+                        </a:rPr>
+                        <a:t>Korrekte Reisestatistik</a:t>
+                      </a:r>
+                    </a:p>
+                  </a:txBody>
+                  <a:tcPr marL="64008" marR="64008" marT="27432" marB="27432">
+                    <a:solidFill>
+                      <a:srgbClr val="FFFFFF"/>
+                    </a:solidFill>
+                  </a:tcPr>
+                </a:tc>
+                <a:tc>
+                  <a:txBody>
+                    <a:bodyPr/>
+                    <a:lstStyle/>
+                    <a:p>
+                      <a:r>
+                        <a:rPr sz="900" b="0">
+                          <a:solidFill>
+                            <a:srgbClr val="1F2937"/>
+                          </a:solidFill>
+                          <a:latin typeface="Calibri"/>
+                        </a:rPr>
+                        <a:t>Unit, In-Memory-DB seedet Flüge und Endpunkte, Distanz gegen bekannten Wert (111 km)</a:t>
+                      </a:r>
+                    </a:p>
+                  </a:txBody>
+                  <a:tcPr marL="64008" marR="64008" marT="27432" marB="27432">
+                    <a:solidFill>
+                      <a:srgbClr val="FFFFFF"/>
+                    </a:solidFill>
+                  </a:tcPr>
+                </a:tc>
+                <a:extLst>
+                  <a:ext uri="{0D108BD9-81ED-4DB2-BD59-A6C34878D82A}">
+                    <a16:rowId xmlns:a16="http://schemas.microsoft.com/office/drawing/2014/main" val="10003"/>
+                  </a:ext>
+                </a:extLst>
+              </a:tr>
+              <a:tr h="508000">
+                <a:tc>
+                  <a:txBody>
+                    <a:bodyPr/>
+                    <a:lstStyle/>
+                    <a:p>
+                      <a:r>
+                        <a:rPr sz="900" b="1">
+                          <a:solidFill>
+                            <a:srgbClr val="1F2937"/>
+                          </a:solidFill>
+                          <a:latin typeface="Calibri"/>
+                        </a:rPr>
+                        <a:t>Unit vacayService</a:t>
+                      </a:r>
+                    </a:p>
+                  </a:txBody>
+                  <a:tcPr marL="64008" marR="64008" marT="27432" marB="27432">
+                    <a:solidFill>
+                      <a:srgbClr val="FFFFFF"/>
+                    </a:solidFill>
+                  </a:tcPr>
+                </a:tc>
+                <a:tc>
+                  <a:txBody>
+                    <a:bodyPr/>
+                    <a:lstStyle/>
+                    <a:p>
+                      <a:r>
+                        <a:rPr sz="900" b="0">
+                          <a:solidFill>
+                            <a:srgbClr val="1F2937"/>
+                          </a:solidFill>
+                          <a:latin typeface="Calibri"/>
+                        </a:rPr>
+                        <a:t>Urlaubstage verbraucht und übrig</a:t>
+                      </a:r>
+                    </a:p>
+                  </a:txBody>
+                  <a:tcPr marL="64008" marR="64008" marT="27432" marB="27432">
+                    <a:solidFill>
+                      <a:srgbClr val="FFFFFF"/>
+                    </a:solidFill>
+                  </a:tcPr>
+                </a:tc>
+                <a:tc>
+                  <a:txBody>
+                    <a:bodyPr/>
+                    <a:lstStyle/>
+                    <a:p>
+                      <a:r>
+                        <a:rPr sz="900" b="0">
+                          <a:solidFill>
+                            <a:srgbClr val="1F2937"/>
+                          </a:solidFill>
+                          <a:latin typeface="Calibri"/>
+                        </a:rPr>
+                        <a:t>Falsche Resttage wären wertlos</a:t>
+                      </a:r>
+                    </a:p>
+                  </a:txBody>
+                  <a:tcPr marL="64008" marR="64008" marT="27432" marB="27432">
+                    <a:solidFill>
+                      <a:srgbClr val="FFFFFF"/>
+                    </a:solidFill>
+                  </a:tcPr>
+                </a:tc>
+                <a:tc>
+                  <a:txBody>
+                    <a:bodyPr/>
+                    <a:lstStyle/>
+                    <a:p>
+                      <a:r>
+                        <a:rPr sz="900" b="0">
+                          <a:solidFill>
+                            <a:srgbClr val="1F2937"/>
+                          </a:solidFill>
+                          <a:latin typeface="Calibri"/>
+                        </a:rPr>
+                        <a:t>Unit, In-Memory-DB, Plan und Einträge geseedet, WebSocket gemockt, used/remaining geprüft</a:t>
+                      </a:r>
+                    </a:p>
+                  </a:txBody>
+                  <a:tcPr marL="64008" marR="64008" marT="27432" marB="27432">
+                    <a:solidFill>
+                      <a:srgbClr val="FFFFFF"/>
+                    </a:solidFill>
+                  </a:tcPr>
+                </a:tc>
+                <a:extLst>
+                  <a:ext uri="{0D108BD9-81ED-4DB2-BD59-A6C34878D82A}">
+                    <a16:rowId xmlns:a16="http://schemas.microsoft.com/office/drawing/2014/main" val="10004"/>
+                  </a:ext>
+                </a:extLst>
+              </a:tr>
+              <a:tr h="508000">
+                <a:tc>
+                  <a:txBody>
+                    <a:bodyPr/>
+                    <a:lstStyle/>
+                    <a:p>
+                      <a:r>
+                        <a:rPr sz="900" b="1">
+                          <a:solidFill>
+                            <a:srgbClr val="1F2937"/>
+                          </a:solidFill>
+                          <a:latin typeface="Calibri"/>
+                        </a:rPr>
+                        <a:t>Unit journeyLifecycle (Client)</a:t>
+                      </a:r>
+                    </a:p>
+                  </a:txBody>
+                  <a:tcPr marL="64008" marR="64008" marT="27432" marB="27432">
+                    <a:solidFill>
+                      <a:srgbClr val="FFFFFF"/>
+                    </a:solidFill>
+                  </a:tcPr>
+                </a:tc>
+                <a:tc>
+                  <a:txBody>
+                    <a:bodyPr/>
+                    <a:lstStyle/>
+                    <a:p>
+                      <a:r>
+                        <a:rPr sz="900" b="0">
+                          <a:solidFill>
+                            <a:srgbClr val="1F2937"/>
+                          </a:solidFill>
+                          <a:latin typeface="Calibri"/>
+                        </a:rPr>
+                        <a:t>Status live/upcoming/completed/draft</a:t>
+                      </a:r>
+                    </a:p>
+                  </a:txBody>
+                  <a:tcPr marL="64008" marR="64008" marT="27432" marB="27432">
+                    <a:solidFill>
+                      <a:srgbClr val="FFFFFF"/>
+                    </a:solidFill>
+                  </a:tcPr>
+                </a:tc>
+                <a:tc>
+                  <a:txBody>
+                    <a:bodyPr/>
+                    <a:lstStyle/>
+                    <a:p>
+                      <a:r>
+                        <a:rPr sz="900" b="0">
+                          <a:solidFill>
+                            <a:srgbClr val="1F2937"/>
+                          </a:solidFill>
+                          <a:latin typeface="Calibri"/>
+                        </a:rPr>
+                        <a:t>Steuert die UI-Darstellung einer Reise</a:t>
+                      </a:r>
+                    </a:p>
+                  </a:txBody>
+                  <a:tcPr marL="64008" marR="64008" marT="27432" marB="27432">
+                    <a:solidFill>
+                      <a:srgbClr val="FFFFFF"/>
+                    </a:solidFill>
+                  </a:tcPr>
+                </a:tc>
+                <a:tc>
+                  <a:txBody>
+                    <a:bodyPr/>
+                    <a:lstStyle/>
+                    <a:p>
+                      <a:r>
+                        <a:rPr sz="900" b="0">
+                          <a:solidFill>
+                            <a:srgbClr val="1F2937"/>
+                          </a:solidFill>
+                          <a:latin typeface="Calibri"/>
+                        </a:rPr>
+                        <a:t>Unit, Fake-Timer fixiert „heute“, alle Status-Fälle via it.each</a:t>
+                      </a:r>
+                    </a:p>
+                  </a:txBody>
+                  <a:tcPr marL="64008" marR="64008" marT="27432" marB="27432">
+                    <a:solidFill>
+                      <a:srgbClr val="FFFFFF"/>
+                    </a:solidFill>
+                  </a:tcPr>
+                </a:tc>
+                <a:extLst>
+                  <a:ext uri="{0D108BD9-81ED-4DB2-BD59-A6C34878D82A}">
+                    <a16:rowId xmlns:a16="http://schemas.microsoft.com/office/drawing/2014/main" val="10005"/>
+                  </a:ext>
+                </a:extLst>
+              </a:tr>
+              <a:tr h="508000">
+                <a:tc>
+                  <a:txBody>
+                    <a:bodyPr/>
+                    <a:lstStyle/>
+                    <a:p>
+                      <a:r>
+                        <a:rPr sz="900" b="1">
+                          <a:solidFill>
+                            <a:srgbClr val="1F2937"/>
+                          </a:solidFill>
+                          <a:latin typeface="Calibri"/>
+                        </a:rPr>
+                        <a:t>Integration auth, vacay</a:t>
+                      </a:r>
+                    </a:p>
+                  </a:txBody>
+                  <a:tcPr marL="64008" marR="64008" marT="27432" marB="27432">
+                    <a:solidFill>
+                      <a:srgbClr val="FFFFFF"/>
+                    </a:solidFill>
+                  </a:tcPr>
+                </a:tc>
+                <a:tc>
+                  <a:txBody>
+                    <a:bodyPr/>
+                    <a:lstStyle/>
+                    <a:p>
+                      <a:r>
+                        <a:rPr sz="900" b="0">
+                          <a:solidFill>
+                            <a:srgbClr val="1F2937"/>
+                          </a:solidFill>
+                          <a:latin typeface="Calibri"/>
+                        </a:rPr>
+                        <a:t>Login setzt Session und schaltet /me frei, 401 bei falsch, Vacay-Toggle</a:t>
+                      </a:r>
+                    </a:p>
+                  </a:txBody>
+                  <a:tcPr marL="64008" marR="64008" marT="27432" marB="27432">
+                    <a:solidFill>
+                      <a:srgbClr val="FFFFFF"/>
+                    </a:solidFill>
+                  </a:tcPr>
+                </a:tc>
+                <a:tc>
+                  <a:txBody>
+                    <a:bodyPr/>
+                    <a:lstStyle/>
+                    <a:p>
+                      <a:r>
+                        <a:rPr sz="900" b="0">
+                          <a:solidFill>
+                            <a:srgbClr val="1F2937"/>
+                          </a:solidFill>
+                          <a:latin typeface="Calibri"/>
+                        </a:rPr>
+                        <a:t>Auth ist der Sicherheits-Kernpfad</a:t>
+                      </a:r>
+                    </a:p>
+                  </a:txBody>
+                  <a:tcPr marL="64008" marR="64008" marT="27432" marB="27432">
+                    <a:solidFill>
+                      <a:srgbClr val="FFFFFF"/>
+                    </a:solidFill>
+                  </a:tcPr>
+                </a:tc>
+                <a:tc>
+                  <a:txBody>
+                    <a:bodyPr/>
+                    <a:lstStyle/>
+                    <a:p>
+                      <a:r>
+                        <a:rPr sz="900" b="0">
+                          <a:solidFill>
+                            <a:srgbClr val="1F2937"/>
+                          </a:solidFill>
+                          <a:latin typeface="Calibri"/>
+                        </a:rPr>
+                        <a:t>Supertest, echter Login-Endpoint, Set-Cookie geprüft, /me mit Cookie 200, ohne 401</a:t>
+                      </a:r>
+                    </a:p>
+                  </a:txBody>
+                  <a:tcPr marL="64008" marR="64008" marT="27432" marB="27432">
+                    <a:solidFill>
+                      <a:srgbClr val="FFFFFF"/>
+                    </a:solidFill>
+                  </a:tcPr>
+                </a:tc>
+                <a:extLst>
+                  <a:ext uri="{0D108BD9-81ED-4DB2-BD59-A6C34878D82A}">
+                    <a16:rowId xmlns:a16="http://schemas.microsoft.com/office/drawing/2014/main" val="10006"/>
+                  </a:ext>
+                </a:extLst>
+              </a:tr>
+              <a:tr h="508000">
+                <a:tc>
+                  <a:txBody>
+                    <a:bodyPr/>
+                    <a:lstStyle/>
+                    <a:p>
+                      <a:r>
+                        <a:rPr sz="900" b="1">
+                          <a:solidFill>
+                            <a:srgbClr val="1F2937"/>
+                          </a:solidFill>
+                          <a:latin typeface="Calibri"/>
+                        </a:rPr>
+                        <a:t>E2E login.flow, dashboard</a:t>
+                      </a:r>
+                    </a:p>
+                  </a:txBody>
+                  <a:tcPr marL="64008" marR="64008" marT="27432" marB="27432">
+                    <a:solidFill>
+                      <a:srgbClr val="FFFFFF"/>
+                    </a:solidFill>
+                  </a:tcPr>
+                </a:tc>
+                <a:tc>
+                  <a:txBody>
+                    <a:bodyPr/>
+                    <a:lstStyle/>
+                    <a:p>
+                      <a:r>
+                        <a:rPr sz="900" b="0">
+                          <a:solidFill>
+                            <a:srgbClr val="1F2937"/>
+                          </a:solidFill>
+                          <a:latin typeface="Calibri"/>
+                        </a:rPr>
+                        <a:t>Falsch-Login Fehlertext, Login erreicht Dashboard</a:t>
+                      </a:r>
+                    </a:p>
+                  </a:txBody>
+                  <a:tcPr marL="64008" marR="64008" marT="27432" marB="27432">
+                    <a:solidFill>
+                      <a:srgbClr val="FFFFFF"/>
+                    </a:solidFill>
+                  </a:tcPr>
+                </a:tc>
+                <a:tc>
+                  <a:txBody>
+                    <a:bodyPr/>
+                    <a:lstStyle/>
+                    <a:p>
+                      <a:r>
+                        <a:rPr sz="900" b="0">
+                          <a:solidFill>
+                            <a:srgbClr val="1F2937"/>
+                          </a:solidFill>
+                          <a:latin typeface="Calibri"/>
+                        </a:rPr>
+                        <a:t>Anmelde-Flow muss real korrekt sein</a:t>
+                      </a:r>
+                    </a:p>
+                  </a:txBody>
+                  <a:tcPr marL="64008" marR="64008" marT="27432" marB="27432">
+                    <a:solidFill>
+                      <a:srgbClr val="FFFFFF"/>
+                    </a:solidFill>
+                  </a:tcPr>
+                </a:tc>
+                <a:tc>
+                  <a:txBody>
+                    <a:bodyPr/>
+                    <a:lstStyle/>
+                    <a:p>
+                      <a:r>
+                        <a:rPr sz="900" b="0">
+                          <a:solidFill>
+                            <a:srgbClr val="1F2937"/>
+                          </a:solidFill>
+                          <a:latin typeface="Calibri"/>
+                        </a:rPr>
+                        <a:t>Cypress, Falsch-Login bleibt /login mit Fehler; cy.login (inkl. Passwortwechsel) erreicht /dashboard</a:t>
+                      </a:r>
+                    </a:p>
+                  </a:txBody>
+                  <a:tcPr marL="64008" marR="64008" marT="27432" marB="27432">
+                    <a:solidFill>
+                      <a:srgbClr val="FFFFFF"/>
+                    </a:solidFill>
+                  </a:tcPr>
+                </a:tc>
+                <a:extLst>
+                  <a:ext uri="{0D108BD9-81ED-4DB2-BD59-A6C34878D82A}">
+                    <a16:rowId xmlns:a16="http://schemas.microsoft.com/office/drawing/2014/main" val="10007"/>
+                  </a:ext>
+                </a:extLst>
+              </a:tr>
+              <a:tr h="508000">
+                <a:tc>
+                  <a:txBody>
+                    <a:bodyPr/>
+                    <a:lstStyle/>
+                    <a:p>
+                      <a:r>
+                        <a:rPr sz="900" b="1">
+                          <a:solidFill>
+                            <a:srgbClr val="1F2937"/>
+                          </a:solidFill>
+                          <a:latin typeface="Calibri"/>
+                        </a:rPr>
+                        <a:t>Load auth-login</a:t>
+                      </a:r>
+                    </a:p>
+                  </a:txBody>
+                  <a:tcPr marL="64008" marR="64008" marT="27432" marB="27432">
+                    <a:solidFill>
+                      <a:srgbClr val="FFFFFF"/>
+                    </a:solidFill>
+                  </a:tcPr>
+                </a:tc>
+                <a:tc>
+                  <a:txBody>
+                    <a:bodyPr/>
+                    <a:lstStyle/>
+                    <a:p>
+                      <a:r>
+                        <a:rPr sz="900" b="0">
+                          <a:solidFill>
+                            <a:srgbClr val="1F2937"/>
+                          </a:solidFill>
+                          <a:latin typeface="Calibri"/>
+                        </a:rPr>
+                        <a:t>Login-Spike auf bcrypt und Rate-Limiter</a:t>
+                      </a:r>
+                    </a:p>
+                  </a:txBody>
+                  <a:tcPr marL="64008" marR="64008" marT="27432" marB="27432">
+                    <a:solidFill>
+                      <a:srgbClr val="FFFFFF"/>
+                    </a:solidFill>
+                  </a:tcPr>
+                </a:tc>
+                <a:tc>
+                  <a:txBody>
+                    <a:bodyPr/>
+                    <a:lstStyle/>
+                    <a:p>
+                      <a:r>
+                        <a:rPr sz="900" b="0">
+                          <a:solidFill>
+                            <a:srgbClr val="1F2937"/>
+                          </a:solidFill>
+                          <a:latin typeface="Calibri"/>
+                        </a:rPr>
+                        <a:t>Hält der Schutz dem Ansturm stand?</a:t>
+                      </a:r>
+                    </a:p>
+                  </a:txBody>
+                  <a:tcPr marL="64008" marR="64008" marT="27432" marB="27432">
+                    <a:solidFill>
+                      <a:srgbClr val="FFFFFF"/>
+                    </a:solidFill>
+                  </a:tcPr>
+                </a:tc>
+                <a:tc>
+                  <a:txBody>
+                    <a:bodyPr/>
+                    <a:lstStyle/>
+                    <a:p>
+                      <a:r>
+                        <a:rPr sz="900" b="0">
+                          <a:solidFill>
+                            <a:srgbClr val="1F2937"/>
+                          </a:solidFill>
+                          <a:latin typeface="Calibri"/>
+                        </a:rPr>
+                        <a:t>k6 Spike bis 50 VUs, 200 und 429 als erwartet, p95- und Fehler-Schwellen, 429-Anteil als Metrik</a:t>
+                      </a:r>
+                    </a:p>
+                  </a:txBody>
+                  <a:tcPr marL="64008" marR="64008" marT="27432" marB="27432">
+                    <a:solidFill>
+                      <a:srgbClr val="FFFFFF"/>
+                    </a:solidFill>
+                  </a:tcPr>
+                </a:tc>
+                <a:extLst>
+                  <a:ext uri="{0D108BD9-81ED-4DB2-BD59-A6C34878D82A}">
+                    <a16:rowId xmlns:a16="http://schemas.microsoft.com/office/drawing/2014/main" val="10008"/>
+                  </a:ext>
+                </a:extLst>
+              </a:tr>
+            </a:tbl>
+          </a:graphicData>
+        </a:graphic>
+      </p:graphicFrame>
       <p:sp>
         <p:nvSpPr>
           <p:cNvPr id="6" name="TextBox 5"/>
@@ -7972,7 +8773,7 @@
               <a:t>TREK </a:t>
             </a:r>
             <a:r>
-              <a:rPr lang="de-AT" sz="1000" b="0" dirty="0">
+              <a:rPr lang="de-AT" sz="1000" dirty="0">
                 <a:solidFill>
                   <a:srgbClr val="6B7280"/>
                 </a:solidFill>
